--- a/mat_did/Material GIT/Apresentação do GIT.pptx
+++ b/mat_did/Material GIT/Apresentação do GIT.pptx
@@ -17,15 +17,17 @@
     <p:sldId id="268" r:id="rId11"/>
     <p:sldId id="261" r:id="rId12"/>
     <p:sldId id="273" r:id="rId13"/>
-    <p:sldId id="275" r:id="rId14"/>
-    <p:sldId id="276" r:id="rId15"/>
-    <p:sldId id="277" r:id="rId16"/>
-    <p:sldId id="269" r:id="rId17"/>
-    <p:sldId id="262" r:id="rId18"/>
-    <p:sldId id="270" r:id="rId19"/>
-    <p:sldId id="271" r:id="rId20"/>
-    <p:sldId id="272" r:id="rId21"/>
-    <p:sldId id="266" r:id="rId22"/>
+    <p:sldId id="278" r:id="rId14"/>
+    <p:sldId id="275" r:id="rId15"/>
+    <p:sldId id="276" r:id="rId16"/>
+    <p:sldId id="279" r:id="rId17"/>
+    <p:sldId id="277" r:id="rId18"/>
+    <p:sldId id="269" r:id="rId19"/>
+    <p:sldId id="262" r:id="rId20"/>
+    <p:sldId id="270" r:id="rId21"/>
+    <p:sldId id="271" r:id="rId22"/>
+    <p:sldId id="272" r:id="rId23"/>
+    <p:sldId id="266" r:id="rId24"/>
   </p:sldIdLst>
   <p:sldSz cx="12192000" cy="6858000"/>
   <p:notesSz cx="6858000" cy="9144000"/>
@@ -136,8 +138,8 @@
 <p1510:revInfo xmlns:a="http://schemas.openxmlformats.org/drawingml/2006/main" xmlns:r="http://schemas.openxmlformats.org/officeDocument/2006/relationships" xmlns:p1510="http://schemas.microsoft.com/office/powerpoint/2015/10/main">
   <p1510:revLst>
     <p1510:client id="{28FAA37B-992D-4FF8-B296-436558A1F2C8}" v="225" dt="2026-04-28T16:25:58.359"/>
-    <p1510:client id="{610849D6-C85D-4B35-99CD-8522A345350E}" v="2279" dt="2026-04-27T15:07:06.276"/>
     <p1510:client id="{8E7718AC-2879-46FD-AC97-422BF3633D83}" v="329" dt="2026-04-27T15:57:17.213"/>
+    <p1510:client id="{D1B7388D-7972-4DDE-8B1B-FE2F51F03BF8}" v="86" dt="2026-04-29T15:52:59.106"/>
     <p1510:client id="{F774D46D-85C0-4673-8C61-ACC0FE538728}" v="464" dt="2026-04-28T15:33:08.594"/>
   </p1510:revLst>
 </p1510:revInfo>
@@ -330,7 +332,7 @@
             <a:fld id="{B61BEF0D-F0BB-DE4B-95CE-6DB70DBA9567}" type="datetimeFigureOut">
               <a:rPr lang="en-US" dirty="0"/>
               <a:pPr/>
-              <a:t>4/28/2026</a:t>
+              <a:t>4/29/2026</a:t>
             </a:fld>
             <a:endParaRPr lang="en-US" dirty="0"/>
           </a:p>
@@ -669,7 +671,7 @@
             <a:fld id="{B61BEF0D-F0BB-DE4B-95CE-6DB70DBA9567}" type="datetimeFigureOut">
               <a:rPr lang="en-US" dirty="0"/>
               <a:pPr/>
-              <a:t>4/28/2026</a:t>
+              <a:t>4/29/2026</a:t>
             </a:fld>
             <a:endParaRPr lang="en-US" dirty="0"/>
           </a:p>
@@ -1071,7 +1073,7 @@
             <a:fld id="{B61BEF0D-F0BB-DE4B-95CE-6DB70DBA9567}" type="datetimeFigureOut">
               <a:rPr lang="en-US" dirty="0"/>
               <a:pPr/>
-              <a:t>4/28/2026</a:t>
+              <a:t>4/29/2026</a:t>
             </a:fld>
             <a:endParaRPr lang="en-US" dirty="0"/>
           </a:p>
@@ -1408,7 +1410,7 @@
             <a:fld id="{B61BEF0D-F0BB-DE4B-95CE-6DB70DBA9567}" type="datetimeFigureOut">
               <a:rPr lang="en-US" dirty="0"/>
               <a:pPr/>
-              <a:t>4/28/2026</a:t>
+              <a:t>4/29/2026</a:t>
             </a:fld>
             <a:endParaRPr lang="en-US" dirty="0"/>
           </a:p>
@@ -1729,7 +1731,7 @@
             <a:fld id="{B61BEF0D-F0BB-DE4B-95CE-6DB70DBA9567}" type="datetimeFigureOut">
               <a:rPr lang="en-US" dirty="0"/>
               <a:pPr/>
-              <a:t>4/28/2026</a:t>
+              <a:t>4/29/2026</a:t>
             </a:fld>
             <a:endParaRPr lang="en-US" dirty="0"/>
           </a:p>
@@ -2126,7 +2128,7 @@
             <a:fld id="{B61BEF0D-F0BB-DE4B-95CE-6DB70DBA9567}" type="datetimeFigureOut">
               <a:rPr lang="en-US" dirty="0"/>
               <a:pPr/>
-              <a:t>4/28/2026</a:t>
+              <a:t>4/29/2026</a:t>
             </a:fld>
             <a:endParaRPr lang="en-US" dirty="0"/>
           </a:p>
@@ -2383,7 +2385,7 @@
             <a:fld id="{B61BEF0D-F0BB-DE4B-95CE-6DB70DBA9567}" type="datetimeFigureOut">
               <a:rPr lang="en-US" dirty="0"/>
               <a:pPr/>
-              <a:t>4/28/2026</a:t>
+              <a:t>4/29/2026</a:t>
             </a:fld>
             <a:endParaRPr lang="en-US" dirty="0"/>
           </a:p>
@@ -2645,7 +2647,7 @@
             <a:fld id="{B61BEF0D-F0BB-DE4B-95CE-6DB70DBA9567}" type="datetimeFigureOut">
               <a:rPr lang="en-US" dirty="0"/>
               <a:pPr/>
-              <a:t>4/28/2026</a:t>
+              <a:t>4/29/2026</a:t>
             </a:fld>
             <a:endParaRPr lang="en-US" dirty="0"/>
           </a:p>
@@ -2907,7 +2909,7 @@
             <a:fld id="{B61BEF0D-F0BB-DE4B-95CE-6DB70DBA9567}" type="datetimeFigureOut">
               <a:rPr lang="en-US" dirty="0"/>
               <a:pPr/>
-              <a:t>4/28/2026</a:t>
+              <a:t>4/29/2026</a:t>
             </a:fld>
             <a:endParaRPr lang="en-US" dirty="0"/>
           </a:p>
@@ -3237,7 +3239,7 @@
             <a:fld id="{B61BEF0D-F0BB-DE4B-95CE-6DB70DBA9567}" type="datetimeFigureOut">
               <a:rPr lang="en-US" dirty="0"/>
               <a:pPr/>
-              <a:t>4/28/2026</a:t>
+              <a:t>4/29/2026</a:t>
             </a:fld>
             <a:endParaRPr lang="en-US" dirty="0"/>
           </a:p>
@@ -3559,7 +3561,7 @@
             <a:fld id="{B61BEF0D-F0BB-DE4B-95CE-6DB70DBA9567}" type="datetimeFigureOut">
               <a:rPr lang="en-US" dirty="0"/>
               <a:pPr/>
-              <a:t>4/28/2026</a:t>
+              <a:t>4/29/2026</a:t>
             </a:fld>
             <a:endParaRPr lang="en-US" dirty="0"/>
           </a:p>
@@ -4015,7 +4017,7 @@
             <a:fld id="{B61BEF0D-F0BB-DE4B-95CE-6DB70DBA9567}" type="datetimeFigureOut">
               <a:rPr lang="en-US" dirty="0"/>
               <a:pPr/>
-              <a:t>4/28/2026</a:t>
+              <a:t>4/29/2026</a:t>
             </a:fld>
             <a:endParaRPr lang="en-US" dirty="0"/>
           </a:p>
@@ -4221,7 +4223,7 @@
             <a:fld id="{B61BEF0D-F0BB-DE4B-95CE-6DB70DBA9567}" type="datetimeFigureOut">
               <a:rPr lang="en-US" dirty="0"/>
               <a:pPr/>
-              <a:t>4/28/2026</a:t>
+              <a:t>4/29/2026</a:t>
             </a:fld>
             <a:endParaRPr lang="en-US" dirty="0"/>
           </a:p>
@@ -4400,7 +4402,7 @@
             <a:fld id="{B61BEF0D-F0BB-DE4B-95CE-6DB70DBA9567}" type="datetimeFigureOut">
               <a:rPr lang="en-US" dirty="0"/>
               <a:pPr/>
-              <a:t>4/28/2026</a:t>
+              <a:t>4/29/2026</a:t>
             </a:fld>
             <a:endParaRPr lang="en-US" dirty="0"/>
           </a:p>
@@ -4733,7 +4735,7 @@
             <a:fld id="{B61BEF0D-F0BB-DE4B-95CE-6DB70DBA9567}" type="datetimeFigureOut">
               <a:rPr lang="en-US" dirty="0"/>
               <a:pPr/>
-              <a:t>4/28/2026</a:t>
+              <a:t>4/29/2026</a:t>
             </a:fld>
             <a:endParaRPr lang="en-US" dirty="0"/>
           </a:p>
@@ -5075,7 +5077,7 @@
             <a:fld id="{B61BEF0D-F0BB-DE4B-95CE-6DB70DBA9567}" type="datetimeFigureOut">
               <a:rPr lang="en-US" dirty="0"/>
               <a:pPr/>
-              <a:t>4/28/2026</a:t>
+              <a:t>4/29/2026</a:t>
             </a:fld>
             <a:endParaRPr lang="en-US" dirty="0"/>
           </a:p>
@@ -7129,7 +7131,7 @@
             <a:fld id="{B61BEF0D-F0BB-DE4B-95CE-6DB70DBA9567}" type="datetimeFigureOut">
               <a:rPr lang="en-US" dirty="0"/>
               <a:pPr/>
-              <a:t>4/28/2026</a:t>
+              <a:t>4/29/2026</a:t>
             </a:fld>
             <a:endParaRPr lang="en-US" dirty="0"/>
           </a:p>
@@ -7803,7 +7805,7 @@
           </a:xfrm>
           <a:solidFill>
             <a:schemeClr val="tx1">
-              <a:lumMod val="75000"/>
+              <a:lumMod val="50000"/>
             </a:schemeClr>
           </a:solidFill>
           <a:ln>
@@ -8346,7 +8348,12 @@
             <p:ph idx="1"/>
           </p:nvPr>
         </p:nvSpPr>
-        <p:spPr/>
+        <p:spPr>
+          <a:xfrm>
+            <a:off x="2589212" y="1395791"/>
+            <a:ext cx="8915400" cy="4515431"/>
+          </a:xfrm>
+        </p:spPr>
         <p:txBody>
           <a:bodyPr vert="horz" lIns="91440" tIns="45720" rIns="91440" bIns="45720" rtlCol="0" anchor="t">
             <a:normAutofit/>
@@ -8458,97 +8465,52 @@
             <a:pPr>
               <a:buNone/>
             </a:pPr>
-            <a:r>
-              <a:rPr lang="pt-BR"/>
-              <a:t>Clonar um repositório remoto</a:t>
-            </a:r>
             <a:endParaRPr lang="pt-BR" dirty="0"/>
           </a:p>
           <a:p>
-            <a:pPr marL="0">
-              <a:buNone/>
-            </a:pPr>
-            <a:r>
-              <a:rPr lang="pt-BR" sz="1600" b="1" dirty="0" err="1">
-                <a:solidFill>
-                  <a:srgbClr val="FFC000"/>
-                </a:solidFill>
-                <a:latin typeface="Consolas"/>
-              </a:rPr>
-              <a:t>git</a:t>
-            </a:r>
-            <a:r>
-              <a:rPr lang="pt-BR" sz="1600" b="1" dirty="0">
-                <a:solidFill>
-                  <a:srgbClr val="FFC000"/>
-                </a:solidFill>
-                <a:latin typeface="Consolas"/>
-              </a:rPr>
-              <a:t> clone</a:t>
-            </a:r>
-            <a:r>
-              <a:rPr lang="pt-BR" sz="1600" dirty="0">
-                <a:solidFill>
-                  <a:srgbClr val="FFFFFF"/>
-                </a:solidFill>
-                <a:latin typeface="Century Gothic"/>
-              </a:rPr>
-              <a:t> </a:t>
-            </a:r>
-            <a:r>
-              <a:rPr lang="pt-BR" sz="1600" dirty="0">
-                <a:solidFill>
-                  <a:schemeClr val="accent1">
-                    <a:lumMod val="60000"/>
-                    <a:lumOff val="40000"/>
-                  </a:schemeClr>
-                </a:solidFill>
-                <a:latin typeface="Century Gothic"/>
-                <a:hlinkClick r:id="rId2">
-                  <a:extLst>
-                    <a:ext uri="{A12FA001-AC4F-418D-AE19-62706E023703}">
-                      <ahyp:hlinkClr xmlns:ahyp="http://schemas.microsoft.com/office/drawing/2018/hyperlinkcolor" val="tx"/>
-                    </a:ext>
-                  </a:extLst>
-                </a:hlinkClick>
-              </a:rPr>
-              <a:t>https://github.com/usuario/projeto.git</a:t>
-            </a:r>
-            <a:r>
-              <a:rPr lang="pt-BR" sz="1600" dirty="0">
-                <a:solidFill>
-                  <a:schemeClr val="tx1"/>
-                </a:solidFill>
-                <a:latin typeface="Century Gothic"/>
-              </a:rPr>
-              <a:t>: </a:t>
-            </a:r>
-            <a:r>
-              <a:rPr lang="pt-BR" sz="1600" dirty="0">
-                <a:solidFill>
-                  <a:srgbClr val="FFFFFF"/>
-                </a:solidFill>
-                <a:latin typeface="Century Gothic"/>
-              </a:rPr>
-              <a:t>Baixa</a:t>
-            </a:r>
-            <a:r>
-              <a:rPr lang="pt-BR" sz="1600" dirty="0">
-                <a:ea typeface="+mn-lt"/>
-                <a:cs typeface="+mn-lt"/>
-              </a:rPr>
-              <a:t> um repositório da nuvem (por exemplo, do GitHub) para sua máquina, incluindo todo o histórico.</a:t>
-            </a:r>
-            <a:endParaRPr lang="pt-BR" sz="1600" dirty="0"/>
-          </a:p>
-          <a:p>
-            <a:pPr marL="0" indent="0">
+            <a:pPr>
               <a:buNone/>
             </a:pPr>
             <a:endParaRPr lang="pt-BR" dirty="0"/>
           </a:p>
+          <a:p>
+            <a:pPr>
+              <a:buNone/>
+            </a:pPr>
+            <a:endParaRPr lang="pt-BR" dirty="0"/>
+          </a:p>
         </p:txBody>
       </p:sp>
+      <p:pic>
+        <p:nvPicPr>
+          <p:cNvPr id="4" name="Imagem 3">
+            <a:extLst>
+              <a:ext uri="{FF2B5EF4-FFF2-40B4-BE49-F238E27FC236}">
+                <a16:creationId xmlns:a16="http://schemas.microsoft.com/office/drawing/2014/main" id="{469914AE-A07C-79E1-B5FD-F1E9EC047C90}"/>
+              </a:ext>
+            </a:extLst>
+          </p:cNvPr>
+          <p:cNvPicPr>
+            <a:picLocks noChangeAspect="1"/>
+          </p:cNvPicPr>
+          <p:nvPr/>
+        </p:nvPicPr>
+        <p:blipFill>
+          <a:blip r:embed="rId2"/>
+          <a:stretch>
+            <a:fillRect/>
+          </a:stretch>
+        </p:blipFill>
+        <p:spPr>
+          <a:xfrm>
+            <a:off x="2589439" y="3880380"/>
+            <a:ext cx="5924550" cy="790575"/>
+          </a:xfrm>
+          <a:prstGeom prst="rect">
+            <a:avLst/>
+          </a:prstGeom>
+        </p:spPr>
+      </p:pic>
     </p:spTree>
     <p:extLst>
       <p:ext uri="{BB962C8B-B14F-4D97-AF65-F5344CB8AC3E}">
@@ -8563,6 +8525,187 @@
 </file>
 
 <file path=ppt/slides/slide13.xml><?xml version="1.0" encoding="utf-8"?>
+<p:sld xmlns:a="http://schemas.openxmlformats.org/drawingml/2006/main" xmlns:r="http://schemas.openxmlformats.org/officeDocument/2006/relationships" xmlns:p="http://schemas.openxmlformats.org/presentationml/2006/main">
+  <p:cSld>
+    <p:spTree>
+      <p:nvGrpSpPr>
+        <p:cNvPr id="1" name=""/>
+        <p:cNvGrpSpPr/>
+        <p:nvPr/>
+      </p:nvGrpSpPr>
+      <p:grpSpPr>
+        <a:xfrm>
+          <a:off x="0" y="0"/>
+          <a:ext cx="0" cy="0"/>
+          <a:chOff x="0" y="0"/>
+          <a:chExt cx="0" cy="0"/>
+        </a:xfrm>
+      </p:grpSpPr>
+      <p:sp>
+        <p:nvSpPr>
+          <p:cNvPr id="2" name="Título 1">
+            <a:extLst>
+              <a:ext uri="{FF2B5EF4-FFF2-40B4-BE49-F238E27FC236}">
+                <a16:creationId xmlns:a16="http://schemas.microsoft.com/office/drawing/2014/main" id="{D83847CE-8C68-7FDF-6B19-4DAB4249AA2C}"/>
+              </a:ext>
+            </a:extLst>
+          </p:cNvPr>
+          <p:cNvSpPr>
+            <a:spLocks noGrp="1"/>
+          </p:cNvSpPr>
+          <p:nvPr>
+            <p:ph type="title"/>
+          </p:nvPr>
+        </p:nvSpPr>
+        <p:spPr/>
+        <p:txBody>
+          <a:bodyPr/>
+          <a:lstStyle/>
+          <a:p>
+            <a:r>
+              <a:rPr lang="pt-BR"/>
+              <a:t>Outros exemplos</a:t>
+            </a:r>
+          </a:p>
+        </p:txBody>
+      </p:sp>
+      <p:sp>
+        <p:nvSpPr>
+          <p:cNvPr id="3" name="Espaço Reservado para Conteúdo 2">
+            <a:extLst>
+              <a:ext uri="{FF2B5EF4-FFF2-40B4-BE49-F238E27FC236}">
+                <a16:creationId xmlns:a16="http://schemas.microsoft.com/office/drawing/2014/main" id="{77E117DB-BA72-E5C4-6E5E-808F56C776AF}"/>
+              </a:ext>
+            </a:extLst>
+          </p:cNvPr>
+          <p:cNvSpPr>
+            <a:spLocks noGrp="1"/>
+          </p:cNvSpPr>
+          <p:nvPr>
+            <p:ph idx="1"/>
+          </p:nvPr>
+        </p:nvSpPr>
+        <p:spPr/>
+        <p:txBody>
+          <a:bodyPr vert="horz" lIns="91440" tIns="45720" rIns="91440" bIns="45720" rtlCol="0" anchor="t">
+            <a:normAutofit/>
+          </a:bodyPr>
+          <a:lstStyle/>
+          <a:p>
+            <a:pPr>
+              <a:buNone/>
+            </a:pPr>
+            <a:r>
+              <a:rPr lang="pt-BR"/>
+              <a:t>Clonar um repositório remoto</a:t>
+            </a:r>
+          </a:p>
+          <a:p>
+            <a:pPr marL="0">
+              <a:buNone/>
+            </a:pPr>
+            <a:r>
+              <a:rPr lang="pt-BR" sz="1600" b="1" dirty="0" err="1">
+                <a:solidFill>
+                  <a:srgbClr val="FFC000"/>
+                </a:solidFill>
+                <a:latin typeface="Consolas"/>
+              </a:rPr>
+              <a:t>git</a:t>
+            </a:r>
+            <a:r>
+              <a:rPr lang="pt-BR" sz="1600" b="1" dirty="0">
+                <a:solidFill>
+                  <a:srgbClr val="FFC000"/>
+                </a:solidFill>
+                <a:latin typeface="Consolas"/>
+              </a:rPr>
+              <a:t> clone</a:t>
+            </a:r>
+            <a:r>
+              <a:rPr lang="pt-BR" sz="1600" dirty="0"/>
+              <a:t> </a:t>
+            </a:r>
+            <a:r>
+              <a:rPr lang="pt-BR" sz="1600" dirty="0">
+                <a:solidFill>
+                  <a:srgbClr val="EB84EB"/>
+                </a:solidFill>
+                <a:hlinkClick r:id="rId2">
+                  <a:extLst>
+                    <a:ext uri="{A12FA001-AC4F-418D-AE19-62706E023703}">
+                      <ahyp:hlinkClr xmlns:ahyp="http://schemas.microsoft.com/office/drawing/2018/hyperlinkcolor" val="tx"/>
+                    </a:ext>
+                  </a:extLst>
+                </a:hlinkClick>
+              </a:rPr>
+              <a:t>https://github.com/usuario/projeto.git</a:t>
+            </a:r>
+            <a:r>
+              <a:rPr lang="pt-BR" sz="1600" dirty="0">
+                <a:solidFill>
+                  <a:schemeClr val="tx1"/>
+                </a:solidFill>
+              </a:rPr>
+              <a:t>: </a:t>
+            </a:r>
+            <a:r>
+              <a:rPr lang="pt-BR" sz="1600" dirty="0"/>
+              <a:t>Baixa um repositório da nuvem (por exemplo, do GitHub) para sua máquina, incluindo todo o histórico.</a:t>
+            </a:r>
+          </a:p>
+          <a:p>
+            <a:pPr marL="0" indent="0">
+              <a:buNone/>
+            </a:pPr>
+            <a:endParaRPr lang="pt-BR" dirty="0"/>
+          </a:p>
+        </p:txBody>
+      </p:sp>
+      <p:pic>
+        <p:nvPicPr>
+          <p:cNvPr id="4" name="Imagem 3" descr="Texto&#10;&#10;O conteúdo gerado por IA pode estar incorreto.">
+            <a:extLst>
+              <a:ext uri="{FF2B5EF4-FFF2-40B4-BE49-F238E27FC236}">
+                <a16:creationId xmlns:a16="http://schemas.microsoft.com/office/drawing/2014/main" id="{F7B44B2C-B4D3-4A90-398D-39436EC7273A}"/>
+              </a:ext>
+            </a:extLst>
+          </p:cNvPr>
+          <p:cNvPicPr>
+            <a:picLocks noChangeAspect="1"/>
+          </p:cNvPicPr>
+          <p:nvPr/>
+        </p:nvPicPr>
+        <p:blipFill>
+          <a:blip r:embed="rId3"/>
+          <a:stretch>
+            <a:fillRect/>
+          </a:stretch>
+        </p:blipFill>
+        <p:spPr>
+          <a:xfrm>
+            <a:off x="2590951" y="3435048"/>
+            <a:ext cx="4763100" cy="2992408"/>
+          </a:xfrm>
+          <a:prstGeom prst="rect">
+            <a:avLst/>
+          </a:prstGeom>
+        </p:spPr>
+      </p:pic>
+    </p:spTree>
+    <p:extLst>
+      <p:ext uri="{BB962C8B-B14F-4D97-AF65-F5344CB8AC3E}">
+        <p14:creationId xmlns:p14="http://schemas.microsoft.com/office/powerpoint/2010/main" val="325497820"/>
+      </p:ext>
+    </p:extLst>
+  </p:cSld>
+  <p:clrMapOvr>
+    <a:masterClrMapping/>
+  </p:clrMapOvr>
+</p:sld>
+</file>
+
+<file path=ppt/slides/slide14.xml><?xml version="1.0" encoding="utf-8"?>
 <p:sld xmlns:a="http://schemas.openxmlformats.org/drawingml/2006/main" xmlns:r="http://schemas.openxmlformats.org/officeDocument/2006/relationships" xmlns:p="http://schemas.openxmlformats.org/presentationml/2006/main">
   <p:cSld>
     <p:spTree>
@@ -8652,13 +8795,7 @@
               <a:rPr lang="pt-BR" sz="1600" dirty="0">
                 <a:latin typeface="Century Gothic"/>
               </a:rPr>
-              <a:t>Após o projeto alcançar um desenvolvimento apropriado, se é recomendado realizar </a:t>
-            </a:r>
-            <a:r>
-              <a:rPr lang="pt-BR" sz="1600">
-                <a:latin typeface="Century Gothic"/>
-              </a:rPr>
-              <a:t>um </a:t>
+              <a:t>Após o projeto alcançar um desenvolvimento apropriado, se é recomendado realizar um </a:t>
             </a:r>
             <a:r>
               <a:rPr lang="pt-BR" sz="1600" dirty="0" err="1">
@@ -8692,7 +8829,7 @@
               <a:buNone/>
             </a:pPr>
             <a:r>
-              <a:rPr lang="pt-BR" sz="1600" b="1" dirty="0" err="1">
+              <a:rPr lang="pt-BR" sz="1600" b="1" err="1">
                 <a:solidFill>
                   <a:srgbClr val="FFC000"/>
                 </a:solidFill>
@@ -8710,7 +8847,7 @@
               <a:t> </a:t>
             </a:r>
             <a:r>
-              <a:rPr lang="pt-BR" sz="1600" b="1" dirty="0" err="1">
+              <a:rPr lang="pt-BR" sz="1600" b="1" err="1">
                 <a:solidFill>
                   <a:srgbClr val="FFC000"/>
                 </a:solidFill>
@@ -8726,88 +8863,88 @@
                 <a:latin typeface="Consolas"/>
               </a:rPr>
               <a:t> arquivo.txt</a:t>
+            </a:r>
+            <a:r>
+              <a:rPr lang="pt-BR" dirty="0">
+                <a:latin typeface="Century Gothic"/>
+              </a:rPr>
+              <a:t>: envia o arquivo para a </a:t>
+            </a:r>
+            <a:r>
+              <a:rPr lang="pt-BR" i="1" err="1">
+                <a:latin typeface="Century Gothic"/>
+              </a:rPr>
+              <a:t>staging</a:t>
+            </a:r>
+            <a:r>
+              <a:rPr lang="pt-BR" i="1" dirty="0">
+                <a:latin typeface="Century Gothic"/>
+              </a:rPr>
+              <a:t> </a:t>
+            </a:r>
+            <a:r>
+              <a:rPr lang="pt-BR" i="1" err="1">
+                <a:latin typeface="Century Gothic"/>
+              </a:rPr>
+              <a:t>area</a:t>
             </a:r>
             <a:r>
               <a:rPr lang="pt-BR">
                 <a:latin typeface="Century Gothic"/>
               </a:rPr>
-              <a:t>: envia</a:t>
+              <a:t> (área de preparo)</a:t>
+            </a:r>
+          </a:p>
+          <a:p>
+            <a:pPr marL="0">
+              <a:buNone/>
+            </a:pPr>
+            <a:endParaRPr lang="pt-BR"/>
+          </a:p>
+          <a:p>
+            <a:pPr marL="0">
+              <a:buNone/>
+            </a:pPr>
+            <a:r>
+              <a:rPr lang="pt-BR" sz="1600" b="1" dirty="0" err="1">
+                <a:solidFill>
+                  <a:srgbClr val="FFC000"/>
+                </a:solidFill>
+                <a:latin typeface="Consolas"/>
+              </a:rPr>
+              <a:t>git</a:t>
+            </a:r>
+            <a:r>
+              <a:rPr lang="pt-BR" sz="1600" b="1" dirty="0">
+                <a:solidFill>
+                  <a:srgbClr val="FFC000"/>
+                </a:solidFill>
+                <a:latin typeface="Consolas"/>
+              </a:rPr>
+              <a:t> </a:t>
+            </a:r>
+            <a:r>
+              <a:rPr lang="pt-BR" sz="1600" b="1" dirty="0" err="1">
+                <a:solidFill>
+                  <a:srgbClr val="FFC000"/>
+                </a:solidFill>
+                <a:latin typeface="Consolas"/>
+              </a:rPr>
+              <a:t>commit</a:t>
+            </a:r>
+            <a:r>
+              <a:rPr lang="pt-BR" sz="1600" b="1" dirty="0">
+                <a:solidFill>
+                  <a:srgbClr val="FFC000"/>
+                </a:solidFill>
+                <a:latin typeface="Consolas"/>
+              </a:rPr>
+              <a:t> -m "Adiciona arquivo"</a:t>
             </a:r>
             <a:r>
               <a:rPr lang="pt-BR" dirty="0">
                 <a:latin typeface="Century Gothic"/>
               </a:rPr>
-              <a:t> o arquivo para a </a:t>
-            </a:r>
-            <a:r>
-              <a:rPr lang="pt-BR" i="1" dirty="0" err="1">
-                <a:latin typeface="Century Gothic"/>
-              </a:rPr>
-              <a:t>staging</a:t>
-            </a:r>
-            <a:r>
-              <a:rPr lang="pt-BR" i="1" dirty="0">
-                <a:latin typeface="Century Gothic"/>
-              </a:rPr>
-              <a:t> </a:t>
-            </a:r>
-            <a:r>
-              <a:rPr lang="pt-BR" i="1" dirty="0" err="1">
-                <a:latin typeface="Century Gothic"/>
-              </a:rPr>
-              <a:t>area</a:t>
-            </a:r>
-            <a:r>
-              <a:rPr lang="pt-BR" dirty="0">
-                <a:latin typeface="Century Gothic"/>
-              </a:rPr>
-              <a:t> (área de preparo) </a:t>
-            </a:r>
-          </a:p>
-          <a:p>
-            <a:pPr marL="0">
-              <a:buNone/>
-            </a:pPr>
-            <a:r>
-              <a:rPr lang="pt-BR" sz="1600" b="1" dirty="0" err="1">
-                <a:solidFill>
-                  <a:srgbClr val="FFC000"/>
-                </a:solidFill>
-                <a:latin typeface="Consolas"/>
-              </a:rPr>
-              <a:t>git</a:t>
-            </a:r>
-            <a:r>
-              <a:rPr lang="pt-BR" sz="1600" b="1" dirty="0">
-                <a:solidFill>
-                  <a:srgbClr val="FFC000"/>
-                </a:solidFill>
-                <a:latin typeface="Consolas"/>
-              </a:rPr>
-              <a:t> </a:t>
-            </a:r>
-            <a:r>
-              <a:rPr lang="pt-BR" sz="1600" b="1" dirty="0" err="1">
-                <a:solidFill>
-                  <a:srgbClr val="FFC000"/>
-                </a:solidFill>
-                <a:latin typeface="Consolas"/>
-              </a:rPr>
-              <a:t>commit</a:t>
-            </a:r>
-            <a:r>
-              <a:rPr lang="pt-BR" sz="1600" b="1" dirty="0">
-                <a:solidFill>
-                  <a:srgbClr val="FFC000"/>
-                </a:solidFill>
-                <a:latin typeface="Consolas"/>
-              </a:rPr>
-              <a:t> -m "Adiciona arquivo"</a:t>
-            </a:r>
-            <a:r>
-              <a:rPr lang="pt-BR" dirty="0">
-                <a:latin typeface="Century Gothic"/>
-              </a:rPr>
               <a:t>: salva definitivamente a alteração no histórico do projeto</a:t>
             </a:r>
             <a:endParaRPr lang="pt-BR" dirty="0"/>
@@ -8826,6 +8963,66 @@
           </a:p>
         </p:txBody>
       </p:sp>
+      <p:pic>
+        <p:nvPicPr>
+          <p:cNvPr id="4" name="Imagem 3">
+            <a:extLst>
+              <a:ext uri="{FF2B5EF4-FFF2-40B4-BE49-F238E27FC236}">
+                <a16:creationId xmlns:a16="http://schemas.microsoft.com/office/drawing/2014/main" id="{A7AD6232-4876-CE66-09DA-C82E7A853455}"/>
+              </a:ext>
+            </a:extLst>
+          </p:cNvPr>
+          <p:cNvPicPr>
+            <a:picLocks noChangeAspect="1"/>
+          </p:cNvPicPr>
+          <p:nvPr/>
+        </p:nvPicPr>
+        <p:blipFill>
+          <a:blip r:embed="rId2"/>
+          <a:stretch>
+            <a:fillRect/>
+          </a:stretch>
+        </p:blipFill>
+        <p:spPr>
+          <a:xfrm>
+            <a:off x="2598738" y="4406900"/>
+            <a:ext cx="5953125" cy="381000"/>
+          </a:xfrm>
+          <a:prstGeom prst="rect">
+            <a:avLst/>
+          </a:prstGeom>
+        </p:spPr>
+      </p:pic>
+      <p:pic>
+        <p:nvPicPr>
+          <p:cNvPr id="5" name="Imagem 4">
+            <a:extLst>
+              <a:ext uri="{FF2B5EF4-FFF2-40B4-BE49-F238E27FC236}">
+                <a16:creationId xmlns:a16="http://schemas.microsoft.com/office/drawing/2014/main" id="{CA1EE4BB-4792-A79F-78DF-5152B584F73C}"/>
+              </a:ext>
+            </a:extLst>
+          </p:cNvPr>
+          <p:cNvPicPr>
+            <a:picLocks noChangeAspect="1"/>
+          </p:cNvPicPr>
+          <p:nvPr/>
+        </p:nvPicPr>
+        <p:blipFill>
+          <a:blip r:embed="rId3"/>
+          <a:stretch>
+            <a:fillRect/>
+          </a:stretch>
+        </p:blipFill>
+        <p:spPr>
+          <a:xfrm>
+            <a:off x="2586038" y="5478463"/>
+            <a:ext cx="6029325" cy="295275"/>
+          </a:xfrm>
+          <a:prstGeom prst="rect">
+            <a:avLst/>
+          </a:prstGeom>
+        </p:spPr>
+      </p:pic>
     </p:spTree>
     <p:extLst>
       <p:ext uri="{BB962C8B-B14F-4D97-AF65-F5344CB8AC3E}">
@@ -8839,7 +9036,7 @@
 </p:sld>
 </file>
 
-<file path=ppt/slides/slide14.xml><?xml version="1.0" encoding="utf-8"?>
+<file path=ppt/slides/slide15.xml><?xml version="1.0" encoding="utf-8"?>
 <p:sld xmlns:a="http://schemas.openxmlformats.org/drawingml/2006/main" xmlns:r="http://schemas.openxmlformats.org/officeDocument/2006/relationships" xmlns:p="http://schemas.openxmlformats.org/presentationml/2006/main">
   <p:cSld>
     <p:spTree>
@@ -8906,10 +9103,15 @@
             <p:ph idx="1"/>
           </p:nvPr>
         </p:nvSpPr>
-        <p:spPr/>
+        <p:spPr>
+          <a:xfrm>
+            <a:off x="2589212" y="1511300"/>
+            <a:ext cx="8915400" cy="5161922"/>
+          </a:xfrm>
+        </p:spPr>
         <p:txBody>
           <a:bodyPr vert="horz" lIns="91440" tIns="45720" rIns="91440" bIns="45720" rtlCol="0" anchor="t">
-            <a:normAutofit fontScale="85000" lnSpcReduction="20000"/>
+            <a:normAutofit/>
           </a:bodyPr>
           <a:lstStyle/>
           <a:p>
@@ -9078,122 +9280,13 @@
             <a:pPr marL="0" indent="0">
               <a:buNone/>
             </a:pPr>
-            <a:r>
-              <a:rPr lang="pt-BR" sz="1900" dirty="0"/>
-              <a:t>Ir para sua </a:t>
-            </a:r>
-            <a:r>
-              <a:rPr lang="pt-BR" sz="1900" dirty="0" err="1"/>
-              <a:t>branch</a:t>
-            </a:r>
-            <a:r>
-              <a:rPr lang="pt-BR" sz="1900" dirty="0"/>
-              <a:t> e mesclar</a:t>
-            </a:r>
+            <a:endParaRPr lang="pt-BR" sz="1900" dirty="0"/>
           </a:p>
           <a:p>
             <a:pPr marL="0" indent="0">
               <a:buNone/>
             </a:pPr>
-            <a:r>
-              <a:rPr lang="pt-BR" sz="1900" b="1" dirty="0" err="1">
-                <a:solidFill>
-                  <a:srgbClr val="FFC000"/>
-                </a:solidFill>
-                <a:latin typeface="Consolas"/>
-              </a:rPr>
-              <a:t>git</a:t>
-            </a:r>
-            <a:r>
-              <a:rPr lang="pt-BR" sz="1900" b="1" dirty="0">
-                <a:solidFill>
-                  <a:srgbClr val="FFC000"/>
-                </a:solidFill>
-                <a:latin typeface="Consolas"/>
-              </a:rPr>
-              <a:t> checkout minha-</a:t>
-            </a:r>
-            <a:r>
-              <a:rPr lang="pt-BR" sz="1900" b="1" dirty="0" err="1">
-                <a:solidFill>
-                  <a:srgbClr val="FFC000"/>
-                </a:solidFill>
-                <a:latin typeface="Consolas"/>
-              </a:rPr>
-              <a:t>branch</a:t>
-            </a:r>
-            <a:r>
-              <a:rPr lang="pt-BR" sz="1600" dirty="0">
-                <a:latin typeface="Century Gothic"/>
-              </a:rPr>
-              <a:t>: Volta para sua </a:t>
-            </a:r>
-            <a:r>
-              <a:rPr lang="pt-BR" sz="1600" dirty="0" err="1">
-                <a:latin typeface="Century Gothic"/>
-              </a:rPr>
-              <a:t>branch</a:t>
-            </a:r>
-            <a:r>
-              <a:rPr lang="pt-BR" sz="1600" dirty="0">
-                <a:latin typeface="Century Gothic"/>
-              </a:rPr>
-              <a:t> </a:t>
-            </a:r>
-            <a:br>
-              <a:rPr lang="pt-BR" sz="1600" dirty="0">
-                <a:latin typeface="Century Gothic"/>
-              </a:rPr>
-            </a:br>
-            <a:r>
-              <a:rPr lang="pt-BR" sz="1900" b="1" dirty="0" err="1">
-                <a:solidFill>
-                  <a:srgbClr val="FFC000"/>
-                </a:solidFill>
-                <a:latin typeface="Consolas"/>
-              </a:rPr>
-              <a:t>git</a:t>
-            </a:r>
-            <a:r>
-              <a:rPr lang="pt-BR" sz="1900" b="1" dirty="0">
-                <a:solidFill>
-                  <a:srgbClr val="FFC000"/>
-                </a:solidFill>
-                <a:latin typeface="Consolas"/>
-              </a:rPr>
-              <a:t> merge </a:t>
-            </a:r>
-            <a:r>
-              <a:rPr lang="pt-BR" sz="1900" b="1" dirty="0" err="1">
-                <a:solidFill>
-                  <a:srgbClr val="FFC000"/>
-                </a:solidFill>
-                <a:latin typeface="Consolas"/>
-              </a:rPr>
-              <a:t>main</a:t>
-            </a:r>
-            <a:r>
-              <a:rPr lang="pt-BR" sz="1900" b="1" dirty="0">
-                <a:solidFill>
-                  <a:srgbClr val="FFC000"/>
-                </a:solidFill>
-                <a:latin typeface="Consolas"/>
-              </a:rPr>
-              <a:t>:</a:t>
-            </a:r>
-            <a:r>
-              <a:rPr lang="pt-BR" sz="1600" dirty="0">
-                <a:latin typeface="Century Gothic"/>
-              </a:rPr>
-              <a:t> traz as atualizações da principal para sua </a:t>
-            </a:r>
-            <a:r>
-              <a:rPr lang="pt-BR" sz="1600" dirty="0" err="1">
-                <a:latin typeface="Century Gothic"/>
-              </a:rPr>
-              <a:t>branch</a:t>
-            </a:r>
-            <a:endParaRPr lang="pt-BR" sz="1600" dirty="0" err="1"/>
+            <a:endParaRPr lang="pt-BR" sz="1900" dirty="0"/>
           </a:p>
           <a:p>
             <a:pPr>
@@ -9215,287 +9308,70 @@
           </a:p>
         </p:txBody>
       </p:sp>
+      <p:pic>
+        <p:nvPicPr>
+          <p:cNvPr id="4" name="Imagem 3">
+            <a:extLst>
+              <a:ext uri="{FF2B5EF4-FFF2-40B4-BE49-F238E27FC236}">
+                <a16:creationId xmlns:a16="http://schemas.microsoft.com/office/drawing/2014/main" id="{5023E1BB-6DD8-1252-45B5-B2D03B094A81}"/>
+              </a:ext>
+            </a:extLst>
+          </p:cNvPr>
+          <p:cNvPicPr>
+            <a:picLocks noChangeAspect="1"/>
+          </p:cNvPicPr>
+          <p:nvPr/>
+        </p:nvPicPr>
+        <p:blipFill>
+          <a:blip r:embed="rId2"/>
+          <a:stretch>
+            <a:fillRect/>
+          </a:stretch>
+        </p:blipFill>
+        <p:spPr>
+          <a:xfrm>
+            <a:off x="2595563" y="5049838"/>
+            <a:ext cx="7546975" cy="441325"/>
+          </a:xfrm>
+          <a:prstGeom prst="rect">
+            <a:avLst/>
+          </a:prstGeom>
+        </p:spPr>
+      </p:pic>
+      <p:pic>
+        <p:nvPicPr>
+          <p:cNvPr id="5" name="Imagem 4">
+            <a:extLst>
+              <a:ext uri="{FF2B5EF4-FFF2-40B4-BE49-F238E27FC236}">
+                <a16:creationId xmlns:a16="http://schemas.microsoft.com/office/drawing/2014/main" id="{E3161464-2FA1-6E4C-6C34-ECE35484B4D4}"/>
+              </a:ext>
+            </a:extLst>
+          </p:cNvPr>
+          <p:cNvPicPr>
+            <a:picLocks noChangeAspect="1"/>
+          </p:cNvPicPr>
+          <p:nvPr/>
+        </p:nvPicPr>
+        <p:blipFill>
+          <a:blip r:embed="rId3"/>
+          <a:stretch>
+            <a:fillRect/>
+          </a:stretch>
+        </p:blipFill>
+        <p:spPr>
+          <a:xfrm>
+            <a:off x="2595563" y="5732463"/>
+            <a:ext cx="7546975" cy="485775"/>
+          </a:xfrm>
+          <a:prstGeom prst="rect">
+            <a:avLst/>
+          </a:prstGeom>
+        </p:spPr>
+      </p:pic>
     </p:spTree>
     <p:extLst>
       <p:ext uri="{BB962C8B-B14F-4D97-AF65-F5344CB8AC3E}">
         <p14:creationId xmlns:p14="http://schemas.microsoft.com/office/powerpoint/2010/main" val="3262256541"/>
-      </p:ext>
-    </p:extLst>
-  </p:cSld>
-  <p:clrMapOvr>
-    <a:masterClrMapping/>
-  </p:clrMapOvr>
-</p:sld>
-</file>
-
-<file path=ppt/slides/slide15.xml><?xml version="1.0" encoding="utf-8"?>
-<p:sld xmlns:a="http://schemas.openxmlformats.org/drawingml/2006/main" xmlns:r="http://schemas.openxmlformats.org/officeDocument/2006/relationships" xmlns:p="http://schemas.openxmlformats.org/presentationml/2006/main">
-  <p:cSld>
-    <p:spTree>
-      <p:nvGrpSpPr>
-        <p:cNvPr id="1" name="">
-          <a:extLst>
-            <a:ext uri="{FF2B5EF4-FFF2-40B4-BE49-F238E27FC236}">
-              <a16:creationId xmlns:a16="http://schemas.microsoft.com/office/drawing/2014/main" id="{D4AB3DED-282F-9AE8-8184-7C3541E9A401}"/>
-            </a:ext>
-          </a:extLst>
-        </p:cNvPr>
-        <p:cNvGrpSpPr/>
-        <p:nvPr/>
-      </p:nvGrpSpPr>
-      <p:grpSpPr>
-        <a:xfrm>
-          <a:off x="0" y="0"/>
-          <a:ext cx="0" cy="0"/>
-          <a:chOff x="0" y="0"/>
-          <a:chExt cx="0" cy="0"/>
-        </a:xfrm>
-      </p:grpSpPr>
-      <p:sp>
-        <p:nvSpPr>
-          <p:cNvPr id="2" name="Título 1">
-            <a:extLst>
-              <a:ext uri="{FF2B5EF4-FFF2-40B4-BE49-F238E27FC236}">
-                <a16:creationId xmlns:a16="http://schemas.microsoft.com/office/drawing/2014/main" id="{B2AA66D1-0471-8680-DC3E-D4C15A05F06E}"/>
-              </a:ext>
-            </a:extLst>
-          </p:cNvPr>
-          <p:cNvSpPr>
-            <a:spLocks noGrp="1"/>
-          </p:cNvSpPr>
-          <p:nvPr>
-            <p:ph type="title"/>
-          </p:nvPr>
-        </p:nvSpPr>
-        <p:spPr/>
-        <p:txBody>
-          <a:bodyPr/>
-          <a:lstStyle/>
-          <a:p>
-            <a:r>
-              <a:rPr lang="pt-BR"/>
-              <a:t>Outros exemplos</a:t>
-            </a:r>
-          </a:p>
-        </p:txBody>
-      </p:sp>
-      <p:sp>
-        <p:nvSpPr>
-          <p:cNvPr id="3" name="Espaço Reservado para Conteúdo 2">
-            <a:extLst>
-              <a:ext uri="{FF2B5EF4-FFF2-40B4-BE49-F238E27FC236}">
-                <a16:creationId xmlns:a16="http://schemas.microsoft.com/office/drawing/2014/main" id="{7EB1AFBF-06F4-0533-47CC-523645976AD7}"/>
-              </a:ext>
-            </a:extLst>
-          </p:cNvPr>
-          <p:cNvSpPr>
-            <a:spLocks noGrp="1"/>
-          </p:cNvSpPr>
-          <p:nvPr>
-            <p:ph idx="1"/>
-          </p:nvPr>
-        </p:nvSpPr>
-        <p:spPr/>
-        <p:txBody>
-          <a:bodyPr vert="horz" lIns="91440" tIns="45720" rIns="91440" bIns="45720" rtlCol="0" anchor="t">
-            <a:normAutofit lnSpcReduction="10000"/>
-          </a:bodyPr>
-          <a:lstStyle/>
-          <a:p>
-            <a:pPr marL="0">
-              <a:buNone/>
-            </a:pPr>
-            <a:r>
-              <a:rPr lang="pt-BR" sz="2400"/>
-              <a:t>4. Resetar arquivo sem perder alterações</a:t>
-            </a:r>
-            <a:endParaRPr lang="pt-BR" sz="2400" dirty="0"/>
-          </a:p>
-          <a:p>
-            <a:pPr marL="0">
-              <a:buNone/>
-            </a:pPr>
-            <a:r>
-              <a:rPr lang="pt-BR" sz="1600" dirty="0"/>
-              <a:t>Quando se vê que a </a:t>
-            </a:r>
-            <a:r>
-              <a:rPr lang="pt-BR" sz="1600"/>
-              <a:t>ideia</a:t>
-            </a:r>
-            <a:r>
-              <a:rPr lang="pt-BR" sz="1600" dirty="0"/>
-              <a:t> testada em um ramo</a:t>
-            </a:r>
-            <a:r>
-              <a:rPr lang="pt-BR" sz="1600" i="1" dirty="0"/>
-              <a:t> não dará frutos imediatos, é as vezes necessário momentaneamente guardar aquele ramo e voltar ao trabalho principal.</a:t>
-            </a:r>
-          </a:p>
-          <a:p>
-            <a:pPr marL="0">
-              <a:buNone/>
-            </a:pPr>
-            <a:endParaRPr lang="pt-BR" sz="1600" dirty="0"/>
-          </a:p>
-          <a:p>
-            <a:pPr marL="0">
-              <a:buNone/>
-            </a:pPr>
-            <a:r>
-              <a:rPr lang="pt-BR"/>
-              <a:t>Opção segura para guardar alterações</a:t>
-            </a:r>
-          </a:p>
-          <a:p>
-            <a:pPr marL="0">
-              <a:buNone/>
-            </a:pPr>
-            <a:r>
-              <a:rPr lang="pt-BR" sz="1600" b="1" dirty="0" err="1">
-                <a:solidFill>
-                  <a:srgbClr val="FFC000"/>
-                </a:solidFill>
-                <a:latin typeface="Consolas"/>
-              </a:rPr>
-              <a:t>git</a:t>
-            </a:r>
-            <a:r>
-              <a:rPr lang="pt-BR" sz="1600" b="1" dirty="0">
-                <a:solidFill>
-                  <a:srgbClr val="FFC000"/>
-                </a:solidFill>
-                <a:latin typeface="Consolas"/>
-              </a:rPr>
-              <a:t> </a:t>
-            </a:r>
-            <a:r>
-              <a:rPr lang="pt-BR" sz="1600" b="1" dirty="0" err="1">
-                <a:solidFill>
-                  <a:srgbClr val="FFC000"/>
-                </a:solidFill>
-                <a:latin typeface="Consolas"/>
-              </a:rPr>
-              <a:t>stash</a:t>
-            </a:r>
-            <a:r>
-              <a:rPr lang="pt-BR" sz="1600" dirty="0">
-                <a:ea typeface="+mn-lt"/>
-                <a:cs typeface="+mn-lt"/>
-              </a:rPr>
-              <a:t>: Salva temporariamente todas as suas alterações (como se colocasse numa gaveta).</a:t>
-            </a:r>
-            <a:endParaRPr lang="pt-BR" sz="1600"/>
-          </a:p>
-          <a:p>
-            <a:pPr marL="0">
-              <a:buNone/>
-            </a:pPr>
-            <a:endParaRPr lang="pt-BR" sz="1600" dirty="0"/>
-          </a:p>
-          <a:p>
-            <a:pPr marL="0">
-              <a:buNone/>
-            </a:pPr>
-            <a:r>
-              <a:rPr lang="pt-BR" sz="1900"/>
-              <a:t>Restaurar o arquivo ao estado original</a:t>
-            </a:r>
-            <a:endParaRPr lang="pt-BR" sz="1900" dirty="0"/>
-          </a:p>
-          <a:p>
-            <a:pPr marL="0">
-              <a:buNone/>
-            </a:pPr>
-            <a:r>
-              <a:rPr lang="pt-BR" sz="1600" b="1" dirty="0" err="1">
-                <a:solidFill>
-                  <a:srgbClr val="FFC000"/>
-                </a:solidFill>
-                <a:latin typeface="Consolas"/>
-              </a:rPr>
-              <a:t>git</a:t>
-            </a:r>
-            <a:r>
-              <a:rPr lang="pt-BR" sz="1600" b="1" dirty="0">
-                <a:solidFill>
-                  <a:srgbClr val="FFC000"/>
-                </a:solidFill>
-                <a:latin typeface="Consolas"/>
-              </a:rPr>
-              <a:t> checkout </a:t>
-            </a:r>
-            <a:r>
-              <a:rPr lang="pt-BR" sz="1600" b="1" dirty="0" err="1">
-                <a:solidFill>
-                  <a:srgbClr val="FFC000"/>
-                </a:solidFill>
-                <a:latin typeface="Consolas"/>
-              </a:rPr>
-              <a:t>main</a:t>
-            </a:r>
-            <a:r>
-              <a:rPr lang="pt-BR" sz="1600" b="1" dirty="0">
-                <a:solidFill>
-                  <a:srgbClr val="FFC000"/>
-                </a:solidFill>
-                <a:latin typeface="Consolas"/>
-              </a:rPr>
-              <a:t> -- arquivo.txt</a:t>
-            </a:r>
-            <a:r>
-              <a:rPr lang="pt-BR" sz="1600" dirty="0">
-                <a:ea typeface="+mn-lt"/>
-                <a:cs typeface="+mn-lt"/>
-              </a:rPr>
-              <a:t>: Pega a versão do arquivo da </a:t>
-            </a:r>
-            <a:r>
-              <a:rPr lang="pt-BR" sz="1600" dirty="0" err="1">
-                <a:ea typeface="+mn-lt"/>
-                <a:cs typeface="+mn-lt"/>
-              </a:rPr>
-              <a:t>branch</a:t>
-            </a:r>
-            <a:r>
-              <a:rPr lang="pt-BR" sz="1600" dirty="0">
-                <a:ea typeface="+mn-lt"/>
-                <a:cs typeface="+mn-lt"/>
-              </a:rPr>
-              <a:t> principal e substitui a atual.</a:t>
-            </a:r>
-            <a:endParaRPr lang="pt-BR" sz="1600"/>
-          </a:p>
-          <a:p>
-            <a:pPr marL="0" indent="0">
-              <a:buNone/>
-            </a:pPr>
-            <a:endParaRPr lang="pt-BR" sz="2600" dirty="0"/>
-          </a:p>
-          <a:p>
-            <a:pPr>
-              <a:buNone/>
-            </a:pPr>
-            <a:endParaRPr lang="pt-BR" sz="2400" dirty="0"/>
-          </a:p>
-          <a:p>
-            <a:pPr marL="0" indent="0">
-              <a:buNone/>
-            </a:pPr>
-            <a:endParaRPr lang="pt-BR" sz="2400" dirty="0"/>
-          </a:p>
-          <a:p>
-            <a:pPr marL="0" indent="0">
-              <a:buNone/>
-            </a:pPr>
-            <a:endParaRPr lang="pt-BR" dirty="0"/>
-          </a:p>
-        </p:txBody>
-      </p:sp>
-    </p:spTree>
-    <p:extLst>
-      <p:ext uri="{BB962C8B-B14F-4D97-AF65-F5344CB8AC3E}">
-        <p14:creationId xmlns:p14="http://schemas.microsoft.com/office/powerpoint/2010/main" val="1726710847"/>
       </p:ext>
     </p:extLst>
   </p:cSld>
@@ -9527,7 +9403,7 @@
           <p:cNvPr id="2" name="Título 1">
             <a:extLst>
               <a:ext uri="{FF2B5EF4-FFF2-40B4-BE49-F238E27FC236}">
-                <a16:creationId xmlns:a16="http://schemas.microsoft.com/office/drawing/2014/main" id="{6F990B24-B6E3-F93B-60B1-B659D1A8F071}"/>
+                <a16:creationId xmlns:a16="http://schemas.microsoft.com/office/drawing/2014/main" id="{073F0AA7-477F-3B6C-2057-F51C49FD58A5}"/>
               </a:ext>
             </a:extLst>
           </p:cNvPr>
@@ -9545,7 +9421,7 @@
           <a:p>
             <a:r>
               <a:rPr lang="pt-BR"/>
-              <a:t>Considere um problema</a:t>
+              <a:t>Outros exemplos</a:t>
             </a:r>
           </a:p>
         </p:txBody>
@@ -9555,7 +9431,7 @@
           <p:cNvPr id="3" name="Espaço Reservado para Conteúdo 2">
             <a:extLst>
               <a:ext uri="{FF2B5EF4-FFF2-40B4-BE49-F238E27FC236}">
-                <a16:creationId xmlns:a16="http://schemas.microsoft.com/office/drawing/2014/main" id="{156BC2B4-B492-2C97-B95A-4FE075A4AECF}"/>
+                <a16:creationId xmlns:a16="http://schemas.microsoft.com/office/drawing/2014/main" id="{BD2E3963-95C6-7DC6-8BE2-6CDECC24DAF6}"/>
               </a:ext>
             </a:extLst>
           </p:cNvPr>
@@ -9569,7 +9445,7 @@
         <p:spPr/>
         <p:txBody>
           <a:bodyPr vert="horz" lIns="91440" tIns="45720" rIns="91440" bIns="45720" rtlCol="0" anchor="t">
-            <a:normAutofit lnSpcReduction="10000"/>
+            <a:normAutofit/>
           </a:bodyPr>
           <a:lstStyle/>
           <a:p>
@@ -9577,49 +9453,176 @@
               <a:buNone/>
             </a:pPr>
             <a:r>
-              <a:rPr lang="pt-BR" sz="2800" dirty="0">
-                <a:ea typeface="+mn-lt"/>
-                <a:cs typeface="+mn-lt"/>
-              </a:rPr>
-              <a:t>Um erro crítico é descoberto no código principal enquanto se está trabalhando em uma nova versão de um software, tornando necessário voltar ao arquivo principal sem perder o que se está trabalhando e fazer as alterações sem risco de danificar ainda mais o código, </a:t>
-            </a:r>
-            <a:r>
-              <a:rPr lang="pt-BR" sz="2800">
-                <a:ea typeface="+mn-lt"/>
-                <a:cs typeface="+mn-lt"/>
-              </a:rPr>
-              <a:t>isso é</a:t>
-            </a:r>
-            <a:r>
-              <a:rPr lang="pt-BR" sz="2800" dirty="0">
-                <a:ea typeface="+mn-lt"/>
-                <a:cs typeface="+mn-lt"/>
-              </a:rPr>
-              <a:t> possível? </a:t>
+              <a:rPr lang="pt-BR" sz="1900" dirty="0"/>
+              <a:t>Ir para sua </a:t>
+            </a:r>
+            <a:r>
+              <a:rPr lang="pt-BR" sz="1900" dirty="0" err="1"/>
+              <a:t>branch</a:t>
+            </a:r>
+            <a:r>
+              <a:rPr lang="pt-BR" sz="1900" dirty="0"/>
+              <a:t> e mesclar</a:t>
             </a:r>
           </a:p>
           <a:p>
             <a:pPr marL="0" indent="0">
               <a:buNone/>
             </a:pPr>
-            <a:endParaRPr lang="pt-BR" sz="2800" dirty="0"/>
-          </a:p>
-          <a:p>
-            <a:pPr marL="0" indent="0">
-              <a:buNone/>
-            </a:pPr>
-            <a:r>
-              <a:rPr lang="pt-BR" sz="2000"/>
-              <a:t>Primeiro, vamos entender a ferramenta que iremos utilizar para resolver o problema.</a:t>
-            </a:r>
-            <a:endParaRPr lang="pt-BR" sz="2000" dirty="0"/>
+            <a:r>
+              <a:rPr lang="pt-BR" sz="1900" b="1" dirty="0" err="1">
+                <a:solidFill>
+                  <a:srgbClr val="FFC000"/>
+                </a:solidFill>
+                <a:latin typeface="Consolas"/>
+              </a:rPr>
+              <a:t>git</a:t>
+            </a:r>
+            <a:r>
+              <a:rPr lang="pt-BR" sz="1900" b="1" dirty="0">
+                <a:solidFill>
+                  <a:srgbClr val="FFC000"/>
+                </a:solidFill>
+                <a:latin typeface="Consolas"/>
+              </a:rPr>
+              <a:t> checkout minha-</a:t>
+            </a:r>
+            <a:r>
+              <a:rPr lang="pt-BR" sz="1900" b="1" dirty="0" err="1">
+                <a:solidFill>
+                  <a:srgbClr val="FFC000"/>
+                </a:solidFill>
+                <a:latin typeface="Consolas"/>
+              </a:rPr>
+              <a:t>branch</a:t>
+            </a:r>
+            <a:r>
+              <a:rPr lang="pt-BR" sz="1600" dirty="0"/>
+              <a:t>: Volta para sua </a:t>
+            </a:r>
+            <a:r>
+              <a:rPr lang="pt-BR" sz="1600" dirty="0" err="1"/>
+              <a:t>branch</a:t>
+            </a:r>
+            <a:r>
+              <a:rPr lang="pt-BR" sz="1600" dirty="0"/>
+              <a:t> </a:t>
+            </a:r>
+            <a:br>
+              <a:rPr lang="pt-BR" sz="1600" dirty="0"/>
+            </a:br>
+            <a:r>
+              <a:rPr lang="pt-BR" sz="1900" b="1" dirty="0" err="1">
+                <a:solidFill>
+                  <a:srgbClr val="FFC000"/>
+                </a:solidFill>
+                <a:latin typeface="Consolas"/>
+              </a:rPr>
+              <a:t>git</a:t>
+            </a:r>
+            <a:r>
+              <a:rPr lang="pt-BR" sz="1900" b="1" dirty="0">
+                <a:solidFill>
+                  <a:srgbClr val="FFC000"/>
+                </a:solidFill>
+                <a:latin typeface="Consolas"/>
+              </a:rPr>
+              <a:t> merge </a:t>
+            </a:r>
+            <a:r>
+              <a:rPr lang="pt-BR" sz="1900" b="1" dirty="0" err="1">
+                <a:solidFill>
+                  <a:srgbClr val="FFC000"/>
+                </a:solidFill>
+                <a:latin typeface="Consolas"/>
+              </a:rPr>
+              <a:t>main</a:t>
+            </a:r>
+            <a:r>
+              <a:rPr lang="pt-BR" sz="1900" b="1" dirty="0">
+                <a:solidFill>
+                  <a:srgbClr val="FFC000"/>
+                </a:solidFill>
+                <a:latin typeface="Consolas"/>
+              </a:rPr>
+              <a:t>:</a:t>
+            </a:r>
+            <a:r>
+              <a:rPr lang="pt-BR" sz="1600" dirty="0"/>
+              <a:t> traz as atualizações da principal para sua </a:t>
+            </a:r>
+            <a:r>
+              <a:rPr lang="pt-BR" sz="1600" dirty="0" err="1"/>
+              <a:t>branch</a:t>
+            </a:r>
+            <a:endParaRPr lang="pt-BR" dirty="0" err="1"/>
           </a:p>
         </p:txBody>
       </p:sp>
+      <p:pic>
+        <p:nvPicPr>
+          <p:cNvPr id="4" name="Imagem 3">
+            <a:extLst>
+              <a:ext uri="{FF2B5EF4-FFF2-40B4-BE49-F238E27FC236}">
+                <a16:creationId xmlns:a16="http://schemas.microsoft.com/office/drawing/2014/main" id="{E5E5FB07-A258-08A4-5E66-B0759E397CA9}"/>
+              </a:ext>
+            </a:extLst>
+          </p:cNvPr>
+          <p:cNvPicPr>
+            <a:picLocks noChangeAspect="1"/>
+          </p:cNvPicPr>
+          <p:nvPr/>
+        </p:nvPicPr>
+        <p:blipFill>
+          <a:blip r:embed="rId2"/>
+          <a:stretch>
+            <a:fillRect/>
+          </a:stretch>
+        </p:blipFill>
+        <p:spPr>
+          <a:xfrm>
+            <a:off x="2592388" y="3424238"/>
+            <a:ext cx="7146925" cy="517525"/>
+          </a:xfrm>
+          <a:prstGeom prst="rect">
+            <a:avLst/>
+          </a:prstGeom>
+        </p:spPr>
+      </p:pic>
+      <p:pic>
+        <p:nvPicPr>
+          <p:cNvPr id="5" name="Imagem 4">
+            <a:extLst>
+              <a:ext uri="{FF2B5EF4-FFF2-40B4-BE49-F238E27FC236}">
+                <a16:creationId xmlns:a16="http://schemas.microsoft.com/office/drawing/2014/main" id="{D2E9688C-5CE6-3F98-9432-5311298374A5}"/>
+              </a:ext>
+            </a:extLst>
+          </p:cNvPr>
+          <p:cNvPicPr>
+            <a:picLocks noChangeAspect="1"/>
+          </p:cNvPicPr>
+          <p:nvPr/>
+        </p:nvPicPr>
+        <p:blipFill>
+          <a:blip r:embed="rId3"/>
+          <a:stretch>
+            <a:fillRect/>
+          </a:stretch>
+        </p:blipFill>
+        <p:spPr>
+          <a:xfrm>
+            <a:off x="2593975" y="4560888"/>
+            <a:ext cx="7143750" cy="530225"/>
+          </a:xfrm>
+          <a:prstGeom prst="rect">
+            <a:avLst/>
+          </a:prstGeom>
+        </p:spPr>
+      </p:pic>
     </p:spTree>
     <p:extLst>
       <p:ext uri="{BB962C8B-B14F-4D97-AF65-F5344CB8AC3E}">
-        <p14:creationId xmlns:p14="http://schemas.microsoft.com/office/powerpoint/2010/main" val="965797971"/>
+        <p14:creationId xmlns:p14="http://schemas.microsoft.com/office/powerpoint/2010/main" val="2551211646"/>
       </p:ext>
     </p:extLst>
   </p:cSld>
@@ -9634,7 +9637,13 @@
   <p:cSld>
     <p:spTree>
       <p:nvGrpSpPr>
-        <p:cNvPr id="1" name=""/>
+        <p:cNvPr id="1" name="">
+          <a:extLst>
+            <a:ext uri="{FF2B5EF4-FFF2-40B4-BE49-F238E27FC236}">
+              <a16:creationId xmlns:a16="http://schemas.microsoft.com/office/drawing/2014/main" id="{D4AB3DED-282F-9AE8-8184-7C3541E9A401}"/>
+            </a:ext>
+          </a:extLst>
+        </p:cNvPr>
         <p:cNvGrpSpPr/>
         <p:nvPr/>
       </p:nvGrpSpPr>
@@ -9651,7 +9660,7 @@
           <p:cNvPr id="2" name="Título 1">
             <a:extLst>
               <a:ext uri="{FF2B5EF4-FFF2-40B4-BE49-F238E27FC236}">
-                <a16:creationId xmlns:a16="http://schemas.microsoft.com/office/drawing/2014/main" id="{C74898F8-305F-289F-ECED-47C00F3A435A}"/>
+                <a16:creationId xmlns:a16="http://schemas.microsoft.com/office/drawing/2014/main" id="{B2AA66D1-0471-8680-DC3E-D4C15A05F06E}"/>
               </a:ext>
             </a:extLst>
           </p:cNvPr>
@@ -9669,7 +9678,7 @@
           <a:p>
             <a:r>
               <a:rPr lang="pt-BR"/>
-              <a:t>Exemplo prático</a:t>
+              <a:t>Outros exemplos</a:t>
             </a:r>
           </a:p>
         </p:txBody>
@@ -9679,7 +9688,7 @@
           <p:cNvPr id="3" name="Espaço Reservado para Conteúdo 2">
             <a:extLst>
               <a:ext uri="{FF2B5EF4-FFF2-40B4-BE49-F238E27FC236}">
-                <a16:creationId xmlns:a16="http://schemas.microsoft.com/office/drawing/2014/main" id="{3681C089-4161-E596-39A7-053DCC55AC19}"/>
+                <a16:creationId xmlns:a16="http://schemas.microsoft.com/office/drawing/2014/main" id="{7EB1AFBF-06F4-0533-47CC-523645976AD7}"/>
               </a:ext>
             </a:extLst>
           </p:cNvPr>
@@ -9693,62 +9702,61 @@
         <p:spPr/>
         <p:txBody>
           <a:bodyPr vert="horz" lIns="91440" tIns="45720" rIns="91440" bIns="45720" rtlCol="0" anchor="t">
-            <a:normAutofit fontScale="92500" lnSpcReduction="10000"/>
+            <a:normAutofit lnSpcReduction="10000"/>
           </a:bodyPr>
           <a:lstStyle/>
           <a:p>
-            <a:pPr marL="0" indent="0">
-              <a:buNone/>
-            </a:pPr>
-            <a:r>
-              <a:rPr lang="pt-BR" dirty="0"/>
-              <a:t>Voltando ao problema do </a:t>
-            </a:r>
+            <a:pPr marL="0">
+              <a:buNone/>
+            </a:pPr>
+            <a:r>
+              <a:rPr lang="pt-BR" sz="2400"/>
+              <a:t>4. Resetar arquivo sem perder alterações</a:t>
+            </a:r>
+            <a:endParaRPr lang="pt-BR" sz="2400" dirty="0"/>
+          </a:p>
+          <a:p>
+            <a:pPr marL="0">
+              <a:buNone/>
+            </a:pPr>
+            <a:r>
+              <a:rPr lang="pt-BR" sz="1600" dirty="0"/>
+              <a:t>Quando se vê que a </a:t>
+            </a:r>
+            <a:r>
+              <a:rPr lang="pt-BR" sz="1600"/>
+              <a:t>ideia</a:t>
+            </a:r>
+            <a:r>
+              <a:rPr lang="pt-BR" sz="1600" dirty="0"/>
+              <a:t> testada em um ramo</a:t>
+            </a:r>
+            <a:r>
+              <a:rPr lang="pt-BR" sz="1600" i="1" dirty="0"/>
+              <a:t> não dará frutos imediatos, é as vezes necessário momentaneamente guardar aquele ramo e voltar ao trabalho principal.</a:t>
+            </a:r>
+          </a:p>
+          <a:p>
+            <a:pPr marL="0">
+              <a:buNone/>
+            </a:pPr>
+            <a:endParaRPr lang="pt-BR" sz="1600" dirty="0"/>
+          </a:p>
+          <a:p>
+            <a:pPr marL="0">
+              <a:buNone/>
+            </a:pPr>
             <a:r>
               <a:rPr lang="pt-BR"/>
-              <a:t>início</a:t>
-            </a:r>
-            <a:r>
-              <a:rPr lang="pt-BR" dirty="0"/>
-              <a:t> da apresentação:</a:t>
-            </a:r>
-          </a:p>
-          <a:p>
-            <a:pPr marL="0" indent="0">
-              <a:buNone/>
-            </a:pPr>
-            <a:endParaRPr lang="pt-BR" dirty="0"/>
-          </a:p>
-          <a:p>
-            <a:pPr marL="0" indent="0">
-              <a:buNone/>
-            </a:pPr>
-            <a:r>
-              <a:rPr lang="pt-BR"/>
-              <a:t>Aqui estão os passos que serão seguidos para resolver o problema:</a:t>
-            </a:r>
-          </a:p>
-          <a:p>
-            <a:pPr marL="0" indent="0">
-              <a:buNone/>
-            </a:pPr>
-            <a:endParaRPr lang="pt-BR" dirty="0"/>
-          </a:p>
-          <a:p>
-            <a:pPr marL="0" indent="0">
-              <a:buNone/>
-            </a:pPr>
-            <a:r>
-              <a:rPr lang="pt-BR" sz="1900"/>
-              <a:t>1. Salvar temporariamente o que você está fazendo</a:t>
-            </a:r>
-          </a:p>
-          <a:p>
-            <a:pPr>
-              <a:buNone/>
-            </a:pPr>
-            <a:r>
-              <a:rPr lang="pt-BR" sz="1700" b="1" dirty="0" err="1">
+              <a:t>Opção segura para guardar alterações</a:t>
+            </a:r>
+          </a:p>
+          <a:p>
+            <a:pPr marL="0">
+              <a:buNone/>
+            </a:pPr>
+            <a:r>
+              <a:rPr lang="pt-BR" sz="1600" b="1" dirty="0" err="1">
                 <a:solidFill>
                   <a:srgbClr val="FFC000"/>
                 </a:solidFill>
@@ -9757,7 +9765,7 @@
               <a:t>git</a:t>
             </a:r>
             <a:r>
-              <a:rPr lang="pt-BR" sz="1700" b="1" dirty="0">
+              <a:rPr lang="pt-BR" sz="1600" b="1" dirty="0">
                 <a:solidFill>
                   <a:srgbClr val="FFC000"/>
                 </a:solidFill>
@@ -9766,7 +9774,7 @@
               <a:t> </a:t>
             </a:r>
             <a:r>
-              <a:rPr lang="pt-BR" sz="1700" b="1" dirty="0" err="1">
+              <a:rPr lang="pt-BR" sz="1600" b="1" dirty="0" err="1">
                 <a:solidFill>
                   <a:srgbClr val="FFC000"/>
                 </a:solidFill>
@@ -9775,152 +9783,183 @@
               <a:t>stash</a:t>
             </a:r>
             <a:r>
-              <a:rPr lang="pt-BR" sz="1700" dirty="0">
+              <a:rPr lang="pt-BR" sz="1600" dirty="0">
                 <a:ea typeface="+mn-lt"/>
                 <a:cs typeface="+mn-lt"/>
               </a:rPr>
-              <a:t> </a:t>
-            </a:r>
-            <a:r>
-              <a:rPr lang="pt-BR" sz="1700" b="1" dirty="0">
+              <a:t>: Salva temporariamente todas as suas alterações (como se colocasse numa gaveta).</a:t>
+            </a:r>
+            <a:endParaRPr lang="pt-BR" sz="1600"/>
+          </a:p>
+          <a:p>
+            <a:pPr marL="0">
+              <a:buNone/>
+            </a:pPr>
+            <a:endParaRPr lang="pt-BR" sz="1600" dirty="0"/>
+          </a:p>
+          <a:p>
+            <a:pPr marL="0">
+              <a:buNone/>
+            </a:pPr>
+            <a:r>
+              <a:rPr lang="pt-BR" sz="1900"/>
+              <a:t>Restaurar o arquivo ao estado original</a:t>
+            </a:r>
+            <a:endParaRPr lang="pt-BR" sz="1900" dirty="0"/>
+          </a:p>
+          <a:p>
+            <a:pPr marL="0">
+              <a:buNone/>
+            </a:pPr>
+            <a:r>
+              <a:rPr lang="pt-BR" sz="1600" b="1" dirty="0" err="1">
+                <a:solidFill>
+                  <a:srgbClr val="FFC000"/>
+                </a:solidFill>
+                <a:latin typeface="Consolas"/>
+              </a:rPr>
+              <a:t>git</a:t>
+            </a:r>
+            <a:r>
+              <a:rPr lang="pt-BR" sz="1600" b="1" dirty="0">
+                <a:solidFill>
+                  <a:srgbClr val="FFC000"/>
+                </a:solidFill>
+                <a:latin typeface="Consolas"/>
+              </a:rPr>
+              <a:t> checkout </a:t>
+            </a:r>
+            <a:r>
+              <a:rPr lang="pt-BR" sz="1600" b="1" dirty="0" err="1">
+                <a:solidFill>
+                  <a:srgbClr val="FFC000"/>
+                </a:solidFill>
+                <a:latin typeface="Consolas"/>
+              </a:rPr>
+              <a:t>main</a:t>
+            </a:r>
+            <a:r>
+              <a:rPr lang="pt-BR" sz="1600" b="1" dirty="0">
+                <a:solidFill>
+                  <a:srgbClr val="FFC000"/>
+                </a:solidFill>
+                <a:latin typeface="Consolas"/>
+              </a:rPr>
+              <a:t> -- arquivo.txt</a:t>
+            </a:r>
+            <a:r>
+              <a:rPr lang="pt-BR" sz="1600" dirty="0">
                 <a:ea typeface="+mn-lt"/>
                 <a:cs typeface="+mn-lt"/>
               </a:rPr>
-              <a:t>: </a:t>
-            </a:r>
-            <a:r>
-              <a:rPr lang="pt-BR" sz="1700" dirty="0">
+              <a:t>: Pega a versão do arquivo da </a:t>
+            </a:r>
+            <a:r>
+              <a:rPr lang="pt-BR" sz="1600" dirty="0" err="1">
                 <a:ea typeface="+mn-lt"/>
                 <a:cs typeface="+mn-lt"/>
               </a:rPr>
-              <a:t>Guarda temporariamente suas alterações não </a:t>
-            </a:r>
-            <a:r>
-              <a:rPr lang="pt-BR" sz="1700" dirty="0" err="1">
+              <a:t>branch</a:t>
+            </a:r>
+            <a:r>
+              <a:rPr lang="pt-BR" sz="1600" dirty="0">
                 <a:ea typeface="+mn-lt"/>
                 <a:cs typeface="+mn-lt"/>
               </a:rPr>
-              <a:t>confirmadas  e</a:t>
-            </a:r>
-            <a:r>
-              <a:rPr lang="pt-BR" sz="1700" dirty="0">
-                <a:ea typeface="+mn-lt"/>
-                <a:cs typeface="+mn-lt"/>
-              </a:rPr>
-              <a:t> limpa o diretório de trabalho, permitindo mudar de contexto sem perder nada.</a:t>
-            </a:r>
-            <a:endParaRPr lang="pt-BR" sz="1700"/>
+              <a:t> principal e substitui a atual.</a:t>
+            </a:r>
+            <a:endParaRPr lang="pt-BR" sz="1600"/>
+          </a:p>
+          <a:p>
+            <a:pPr marL="0" indent="0">
+              <a:buNone/>
+            </a:pPr>
+            <a:endParaRPr lang="pt-BR" sz="2600" dirty="0"/>
           </a:p>
           <a:p>
             <a:pPr>
               <a:buNone/>
             </a:pPr>
+            <a:endParaRPr lang="pt-BR" sz="2400" dirty="0"/>
+          </a:p>
+          <a:p>
+            <a:pPr marL="0" indent="0">
+              <a:buNone/>
+            </a:pPr>
+            <a:endParaRPr lang="pt-BR" sz="2400" dirty="0"/>
+          </a:p>
+          <a:p>
+            <a:pPr marL="0" indent="0">
+              <a:buNone/>
+            </a:pPr>
             <a:endParaRPr lang="pt-BR" dirty="0"/>
           </a:p>
-          <a:p>
-            <a:pPr>
-              <a:buNone/>
-            </a:pPr>
-            <a:r>
-              <a:rPr lang="pt-BR" sz="1900" dirty="0"/>
-              <a:t>2. Voltar para a </a:t>
-            </a:r>
-            <a:r>
-              <a:rPr lang="pt-BR" sz="1900" dirty="0" err="1"/>
-              <a:t>branch</a:t>
-            </a:r>
-            <a:r>
-              <a:rPr lang="pt-BR" sz="1900" dirty="0"/>
-              <a:t> principal</a:t>
-            </a:r>
-          </a:p>
-          <a:p>
-            <a:pPr>
-              <a:buNone/>
-            </a:pPr>
-            <a:r>
-              <a:rPr lang="pt-BR" sz="1700" b="1" err="1">
-                <a:solidFill>
-                  <a:srgbClr val="FFC000"/>
-                </a:solidFill>
-                <a:latin typeface="Consolas"/>
-              </a:rPr>
-              <a:t>git</a:t>
-            </a:r>
-            <a:r>
-              <a:rPr lang="pt-BR" sz="1700" b="1" dirty="0">
-                <a:solidFill>
-                  <a:srgbClr val="FFC000"/>
-                </a:solidFill>
-                <a:latin typeface="Consolas"/>
-              </a:rPr>
-              <a:t> checkout </a:t>
-            </a:r>
-            <a:r>
-              <a:rPr lang="pt-BR" sz="1700" b="1" err="1">
-                <a:solidFill>
-                  <a:srgbClr val="FFC000"/>
-                </a:solidFill>
-                <a:latin typeface="Consolas"/>
-              </a:rPr>
-              <a:t>main</a:t>
-            </a:r>
-            <a:r>
-              <a:rPr lang="pt-BR" sz="1700" b="1" dirty="0">
-                <a:ea typeface="+mn-lt"/>
-                <a:cs typeface="+mn-lt"/>
-              </a:rPr>
-              <a:t>: </a:t>
-            </a:r>
-            <a:r>
-              <a:rPr lang="pt-BR" sz="1700" dirty="0">
-                <a:ea typeface="+mn-lt"/>
-                <a:cs typeface="+mn-lt"/>
-              </a:rPr>
-              <a:t>Muda para a </a:t>
-            </a:r>
-            <a:r>
-              <a:rPr lang="pt-BR" sz="1700" err="1">
-                <a:ea typeface="+mn-lt"/>
-                <a:cs typeface="+mn-lt"/>
-              </a:rPr>
-              <a:t>branch</a:t>
-            </a:r>
-            <a:r>
-              <a:rPr lang="pt-BR" sz="1700" dirty="0">
-                <a:ea typeface="+mn-lt"/>
-                <a:cs typeface="+mn-lt"/>
-              </a:rPr>
-              <a:t> principal do projeto, onde está o </a:t>
-            </a:r>
-            <a:r>
-              <a:rPr lang="pt-BR" sz="1700">
-                <a:ea typeface="+mn-lt"/>
-                <a:cs typeface="+mn-lt"/>
-              </a:rPr>
-              <a:t>código “oficial</a:t>
-            </a:r>
-            <a:r>
-              <a:rPr lang="pt-BR" sz="1700" dirty="0">
-                <a:ea typeface="+mn-lt"/>
-                <a:cs typeface="+mn-lt"/>
-              </a:rPr>
-              <a:t>”.</a:t>
-            </a:r>
-            <a:endParaRPr lang="pt-BR" sz="1700" dirty="0"/>
-          </a:p>
-          <a:p>
-            <a:pPr>
-              <a:buNone/>
-            </a:pPr>
-            <a:endParaRPr lang="pt-BR" dirty="0"/>
-          </a:p>
         </p:txBody>
       </p:sp>
+      <p:pic>
+        <p:nvPicPr>
+          <p:cNvPr id="4" name="Imagem 3">
+            <a:extLst>
+              <a:ext uri="{FF2B5EF4-FFF2-40B4-BE49-F238E27FC236}">
+                <a16:creationId xmlns:a16="http://schemas.microsoft.com/office/drawing/2014/main" id="{4737B4E8-46D2-EFAE-1D29-FAEFC2E99F33}"/>
+              </a:ext>
+            </a:extLst>
+          </p:cNvPr>
+          <p:cNvPicPr>
+            <a:picLocks noChangeAspect="1"/>
+          </p:cNvPicPr>
+          <p:nvPr/>
+        </p:nvPicPr>
+        <p:blipFill>
+          <a:blip r:embed="rId2"/>
+          <a:stretch>
+            <a:fillRect/>
+          </a:stretch>
+        </p:blipFill>
+        <p:spPr>
+          <a:xfrm>
+            <a:off x="2598738" y="4398963"/>
+            <a:ext cx="5419725" cy="371475"/>
+          </a:xfrm>
+          <a:prstGeom prst="rect">
+            <a:avLst/>
+          </a:prstGeom>
+        </p:spPr>
+      </p:pic>
+      <p:pic>
+        <p:nvPicPr>
+          <p:cNvPr id="5" name="Imagem 4">
+            <a:extLst>
+              <a:ext uri="{FF2B5EF4-FFF2-40B4-BE49-F238E27FC236}">
+                <a16:creationId xmlns:a16="http://schemas.microsoft.com/office/drawing/2014/main" id="{6723CECD-09DA-3CE1-E2BD-7C8E98D8D221}"/>
+              </a:ext>
+            </a:extLst>
+          </p:cNvPr>
+          <p:cNvPicPr>
+            <a:picLocks noChangeAspect="1"/>
+          </p:cNvPicPr>
+          <p:nvPr/>
+        </p:nvPicPr>
+        <p:blipFill>
+          <a:blip r:embed="rId3"/>
+          <a:stretch>
+            <a:fillRect/>
+          </a:stretch>
+        </p:blipFill>
+        <p:spPr>
+          <a:xfrm>
+            <a:off x="2601913" y="5738813"/>
+            <a:ext cx="5667375" cy="333375"/>
+          </a:xfrm>
+          <a:prstGeom prst="rect">
+            <a:avLst/>
+          </a:prstGeom>
+        </p:spPr>
+      </p:pic>
     </p:spTree>
     <p:extLst>
       <p:ext uri="{BB962C8B-B14F-4D97-AF65-F5344CB8AC3E}">
-        <p14:creationId xmlns:p14="http://schemas.microsoft.com/office/powerpoint/2010/main" val="2204593060"/>
+        <p14:creationId xmlns:p14="http://schemas.microsoft.com/office/powerpoint/2010/main" val="1726710847"/>
       </p:ext>
     </p:extLst>
   </p:cSld>
@@ -9952,7 +9991,7 @@
           <p:cNvPr id="2" name="Título 1">
             <a:extLst>
               <a:ext uri="{FF2B5EF4-FFF2-40B4-BE49-F238E27FC236}">
-                <a16:creationId xmlns:a16="http://schemas.microsoft.com/office/drawing/2014/main" id="{B030202A-434E-C143-E16A-301CE0C409B3}"/>
+                <a16:creationId xmlns:a16="http://schemas.microsoft.com/office/drawing/2014/main" id="{6F990B24-B6E3-F93B-60B1-B659D1A8F071}"/>
               </a:ext>
             </a:extLst>
           </p:cNvPr>
@@ -9970,7 +10009,7 @@
           <a:p>
             <a:r>
               <a:rPr lang="pt-BR"/>
-              <a:t>Exemplo prático</a:t>
+              <a:t>Considere um problema</a:t>
             </a:r>
           </a:p>
         </p:txBody>
@@ -9980,7 +10019,7 @@
           <p:cNvPr id="3" name="Espaço Reservado para Conteúdo 2">
             <a:extLst>
               <a:ext uri="{FF2B5EF4-FFF2-40B4-BE49-F238E27FC236}">
-                <a16:creationId xmlns:a16="http://schemas.microsoft.com/office/drawing/2014/main" id="{90FBAB7E-6A0D-72F8-4557-CF94C58774EF}"/>
+                <a16:creationId xmlns:a16="http://schemas.microsoft.com/office/drawing/2014/main" id="{156BC2B4-B492-2C97-B95A-4FE075A4AECF}"/>
               </a:ext>
             </a:extLst>
           </p:cNvPr>
@@ -9991,401 +10030,60 @@
             <p:ph idx="1"/>
           </p:nvPr>
         </p:nvSpPr>
-        <p:spPr>
-          <a:xfrm>
-            <a:off x="2589212" y="2133600"/>
-            <a:ext cx="8915400" cy="4217237"/>
-          </a:xfrm>
-        </p:spPr>
+        <p:spPr/>
         <p:txBody>
           <a:bodyPr vert="horz" lIns="91440" tIns="45720" rIns="91440" bIns="45720" rtlCol="0" anchor="t">
-            <a:normAutofit fontScale="85000" lnSpcReduction="10000"/>
+            <a:normAutofit lnSpcReduction="10000"/>
           </a:bodyPr>
           <a:lstStyle/>
           <a:p>
-            <a:pPr>
-              <a:buNone/>
-            </a:pPr>
-            <a:r>
-              <a:rPr lang="pt-BR" sz="2600" dirty="0"/>
-              <a:t>3. Criar uma nova </a:t>
-            </a:r>
-            <a:r>
-              <a:rPr lang="pt-BR" sz="2600" err="1"/>
-              <a:t>branch</a:t>
-            </a:r>
-            <a:r>
-              <a:rPr lang="pt-BR" sz="2600" dirty="0"/>
-              <a:t> para corrigir o erro</a:t>
-            </a:r>
-            <a:endParaRPr lang="en-US" sz="2600"/>
-          </a:p>
-          <a:p>
-            <a:pPr>
-              <a:buNone/>
-            </a:pPr>
-            <a:r>
-              <a:rPr lang="pt-BR" sz="1900" b="1" err="1">
-                <a:solidFill>
-                  <a:srgbClr val="FFC000"/>
-                </a:solidFill>
-                <a:latin typeface="Consolas"/>
-              </a:rPr>
-              <a:t>git</a:t>
-            </a:r>
-            <a:r>
-              <a:rPr lang="pt-BR" sz="1900" b="1" dirty="0">
-                <a:solidFill>
-                  <a:srgbClr val="FFC000"/>
-                </a:solidFill>
-                <a:latin typeface="Consolas"/>
-              </a:rPr>
-              <a:t> checkout -b </a:t>
-            </a:r>
-            <a:r>
-              <a:rPr lang="pt-BR" sz="1900" b="1" err="1">
-                <a:solidFill>
-                  <a:srgbClr val="FFC000"/>
-                </a:solidFill>
-                <a:latin typeface="Consolas"/>
-              </a:rPr>
-              <a:t>hotfix</a:t>
-            </a:r>
-            <a:r>
-              <a:rPr lang="pt-BR" sz="1900" b="1" dirty="0">
-                <a:solidFill>
-                  <a:srgbClr val="FFC000"/>
-                </a:solidFill>
-                <a:latin typeface="Consolas"/>
-              </a:rPr>
-              <a:t>-erro-</a:t>
-            </a:r>
-            <a:r>
-              <a:rPr lang="pt-BR" sz="1900" b="1" err="1">
-                <a:solidFill>
-                  <a:srgbClr val="FFC000"/>
-                </a:solidFill>
-                <a:latin typeface="Consolas"/>
-              </a:rPr>
-              <a:t>critico</a:t>
-            </a:r>
-            <a:r>
-              <a:rPr lang="pt-BR" sz="1900" b="1" dirty="0">
-                <a:solidFill>
-                  <a:srgbClr val="FFC000"/>
-                </a:solidFill>
-                <a:latin typeface="Consolas"/>
-              </a:rPr>
-              <a:t>:</a:t>
-            </a:r>
-            <a:r>
-              <a:rPr lang="pt-BR" sz="1900" b="1" dirty="0"/>
-              <a:t> </a:t>
-            </a:r>
-            <a:r>
-              <a:rPr lang="pt-BR" sz="1900" dirty="0"/>
-              <a:t>Cria e já muda para uma nova </a:t>
-            </a:r>
-            <a:r>
-              <a:rPr lang="pt-BR" sz="1900" err="1"/>
-              <a:t>branch</a:t>
-            </a:r>
-            <a:r>
-              <a:rPr lang="pt-BR" sz="1900" dirty="0"/>
-              <a:t>. Isso isola a correção sem afetar o código principal diretamente.</a:t>
-            </a:r>
-            <a:endParaRPr lang="pt-BR" sz="1900"/>
-          </a:p>
-          <a:p>
-            <a:pPr>
-              <a:buNone/>
-            </a:pPr>
+            <a:pPr marL="0" indent="0">
+              <a:buNone/>
+            </a:pPr>
+            <a:r>
+              <a:rPr lang="pt-BR" sz="2800" dirty="0">
+                <a:ea typeface="+mn-lt"/>
+                <a:cs typeface="+mn-lt"/>
+              </a:rPr>
+              <a:t>Um erro crítico é descoberto no código principal enquanto se está trabalhando em uma nova versão de um software, tornando necessário voltar ao arquivo principal sem perder o que se está trabalhando e fazer as alterações sem risco de danificar ainda mais o código, </a:t>
+            </a:r>
+            <a:r>
+              <a:rPr lang="pt-BR" sz="2800">
+                <a:ea typeface="+mn-lt"/>
+                <a:cs typeface="+mn-lt"/>
+              </a:rPr>
+              <a:t>isso é</a:t>
+            </a:r>
+            <a:r>
+              <a:rPr lang="pt-BR" sz="2800" dirty="0">
+                <a:ea typeface="+mn-lt"/>
+                <a:cs typeface="+mn-lt"/>
+              </a:rPr>
+              <a:t> possível? </a:t>
+            </a:r>
+          </a:p>
+          <a:p>
+            <a:pPr marL="0" indent="0">
+              <a:buNone/>
+            </a:pPr>
+            <a:endParaRPr lang="pt-BR" sz="2800" dirty="0"/>
+          </a:p>
+          <a:p>
+            <a:pPr marL="0" indent="0">
+              <a:buNone/>
+            </a:pPr>
+            <a:r>
+              <a:rPr lang="pt-BR" sz="2000"/>
+              <a:t>Primeiro, vamos entender a ferramenta que iremos utilizar para resolver o problema.</a:t>
+            </a:r>
             <a:endParaRPr lang="pt-BR" sz="2000" dirty="0"/>
-          </a:p>
-          <a:p>
-            <a:pPr>
-              <a:buNone/>
-            </a:pPr>
-            <a:r>
-              <a:rPr lang="pt-BR" sz="2600"/>
-              <a:t>4. Corrigir o erro e salvar</a:t>
-            </a:r>
-            <a:endParaRPr lang="en-US" sz="2600"/>
-          </a:p>
-          <a:p>
-            <a:pPr>
-              <a:buNone/>
-            </a:pPr>
-            <a:r>
-              <a:rPr lang="pt-BR" sz="1900" b="1" err="1">
-                <a:solidFill>
-                  <a:srgbClr val="FFC000"/>
-                </a:solidFill>
-                <a:latin typeface="Consolas"/>
-              </a:rPr>
-              <a:t>git</a:t>
-            </a:r>
-            <a:r>
-              <a:rPr lang="pt-BR" sz="1900" b="1" dirty="0">
-                <a:solidFill>
-                  <a:srgbClr val="FFC000"/>
-                </a:solidFill>
-                <a:latin typeface="Consolas"/>
-              </a:rPr>
-              <a:t> </a:t>
-            </a:r>
-            <a:r>
-              <a:rPr lang="pt-BR" sz="1900" b="1" err="1">
-                <a:solidFill>
-                  <a:srgbClr val="FFC000"/>
-                </a:solidFill>
-                <a:latin typeface="Consolas"/>
-              </a:rPr>
-              <a:t>add</a:t>
-            </a:r>
-            <a:r>
-              <a:rPr lang="pt-BR" sz="1900" b="1" dirty="0">
-                <a:solidFill>
-                  <a:srgbClr val="FFC000"/>
-                </a:solidFill>
-                <a:latin typeface="Consolas"/>
-              </a:rPr>
-              <a:t>:</a:t>
-            </a:r>
-            <a:r>
-              <a:rPr lang="pt-BR" sz="1900" dirty="0">
-                <a:latin typeface="Century Gothic"/>
-              </a:rPr>
-              <a:t> prepara as alterações para </a:t>
-            </a:r>
-            <a:r>
-              <a:rPr lang="pt-BR" sz="1900" err="1">
-                <a:latin typeface="Century Gothic"/>
-              </a:rPr>
-              <a:t>commit</a:t>
-            </a:r>
-            <a:r>
-              <a:rPr lang="pt-BR" sz="1900" dirty="0">
-                <a:latin typeface="Century Gothic"/>
-              </a:rPr>
-              <a:t> </a:t>
-            </a:r>
-          </a:p>
-          <a:p>
-            <a:pPr>
-              <a:buNone/>
-            </a:pPr>
-            <a:r>
-              <a:rPr lang="pt-BR" sz="1900" b="1" err="1">
-                <a:solidFill>
-                  <a:srgbClr val="FFC000"/>
-                </a:solidFill>
-                <a:latin typeface="Consolas"/>
-              </a:rPr>
-              <a:t>git</a:t>
-            </a:r>
-            <a:r>
-              <a:rPr lang="pt-BR" sz="1900" b="1" dirty="0">
-                <a:solidFill>
-                  <a:srgbClr val="FFC000"/>
-                </a:solidFill>
-                <a:latin typeface="Consolas"/>
-              </a:rPr>
-              <a:t> </a:t>
-            </a:r>
-            <a:r>
-              <a:rPr lang="pt-BR" sz="1900" b="1" err="1">
-                <a:solidFill>
-                  <a:srgbClr val="FFC000"/>
-                </a:solidFill>
-                <a:latin typeface="Consolas"/>
-              </a:rPr>
-              <a:t>commit</a:t>
-            </a:r>
-            <a:r>
-              <a:rPr lang="pt-BR" sz="1900" b="1" dirty="0">
-                <a:solidFill>
-                  <a:srgbClr val="FFC000"/>
-                </a:solidFill>
-                <a:latin typeface="Consolas"/>
-              </a:rPr>
-              <a:t> -m "Corrige erro crítico</a:t>
-            </a:r>
-            <a:r>
-              <a:rPr lang="pt-BR" sz="1900" dirty="0">
-                <a:latin typeface="Century Gothic"/>
-              </a:rPr>
-              <a:t>": salva a correção no histórico </a:t>
-            </a:r>
-          </a:p>
-          <a:p>
-            <a:pPr indent="0">
-              <a:buNone/>
-            </a:pPr>
-            <a:endParaRPr lang="en-US" sz="3400" dirty="0"/>
-          </a:p>
-          <a:p>
-            <a:pPr>
-              <a:buNone/>
-            </a:pPr>
-            <a:r>
-              <a:rPr lang="pt-BR" sz="2600" dirty="0"/>
-              <a:t>5. Aplicar a correção na </a:t>
-            </a:r>
-            <a:r>
-              <a:rPr lang="pt-BR" sz="2600" err="1"/>
-              <a:t>branch</a:t>
-            </a:r>
-            <a:r>
-              <a:rPr lang="pt-BR" sz="2600" dirty="0"/>
-              <a:t> principal</a:t>
-            </a:r>
-            <a:endParaRPr lang="en-US" sz="2600" dirty="0"/>
-          </a:p>
-          <a:p>
-            <a:pPr>
-              <a:buNone/>
-            </a:pPr>
-            <a:r>
-              <a:rPr lang="pt-BR" sz="1900" b="1" err="1">
-                <a:solidFill>
-                  <a:srgbClr val="FFC000"/>
-                </a:solidFill>
-                <a:latin typeface="Consolas"/>
-              </a:rPr>
-              <a:t>git</a:t>
-            </a:r>
-            <a:r>
-              <a:rPr lang="pt-BR" sz="1900" b="1" dirty="0">
-                <a:solidFill>
-                  <a:srgbClr val="FFC000"/>
-                </a:solidFill>
-                <a:latin typeface="Consolas"/>
-              </a:rPr>
-              <a:t> checkout </a:t>
-            </a:r>
-            <a:r>
-              <a:rPr lang="pt-BR" sz="1900" b="1" err="1">
-                <a:solidFill>
-                  <a:srgbClr val="FFC000"/>
-                </a:solidFill>
-                <a:latin typeface="Consolas"/>
-              </a:rPr>
-              <a:t>main</a:t>
-            </a:r>
-            <a:r>
-              <a:rPr lang="pt-BR" sz="1900" b="1" dirty="0">
-                <a:solidFill>
-                  <a:srgbClr val="FFC000"/>
-                </a:solidFill>
-                <a:latin typeface="Consolas"/>
-              </a:rPr>
-              <a:t>:</a:t>
-            </a:r>
-            <a:r>
-              <a:rPr lang="pt-BR" sz="1900" dirty="0"/>
-              <a:t> Volta para a </a:t>
-            </a:r>
-            <a:r>
-              <a:rPr lang="pt-BR" sz="1900" err="1"/>
-              <a:t>branch</a:t>
-            </a:r>
-            <a:r>
-              <a:rPr lang="pt-BR" sz="1900" dirty="0"/>
-              <a:t> principal</a:t>
-            </a:r>
-            <a:endParaRPr lang="en-US" sz="1900"/>
-          </a:p>
-          <a:p>
-            <a:pPr>
-              <a:buNone/>
-            </a:pPr>
-            <a:r>
-              <a:rPr lang="pt-BR" sz="1900" b="1" err="1">
-                <a:solidFill>
-                  <a:srgbClr val="FFC000"/>
-                </a:solidFill>
-                <a:latin typeface="Consolas"/>
-              </a:rPr>
-              <a:t>git</a:t>
-            </a:r>
-            <a:r>
-              <a:rPr lang="pt-BR" sz="1900" b="1" dirty="0">
-                <a:solidFill>
-                  <a:srgbClr val="FFC000"/>
-                </a:solidFill>
-                <a:latin typeface="Consolas"/>
-              </a:rPr>
-              <a:t> merge </a:t>
-            </a:r>
-            <a:r>
-              <a:rPr lang="pt-BR" sz="1900" b="1" err="1">
-                <a:solidFill>
-                  <a:srgbClr val="FFC000"/>
-                </a:solidFill>
-                <a:latin typeface="Consolas"/>
-              </a:rPr>
-              <a:t>hotfix</a:t>
-            </a:r>
-            <a:r>
-              <a:rPr lang="pt-BR" sz="1900" b="1" dirty="0">
-                <a:solidFill>
-                  <a:srgbClr val="FFC000"/>
-                </a:solidFill>
-                <a:latin typeface="Consolas"/>
-              </a:rPr>
-              <a:t>-erro-</a:t>
-            </a:r>
-            <a:r>
-              <a:rPr lang="pt-BR" sz="1900" b="1" err="1">
-                <a:solidFill>
-                  <a:srgbClr val="FFC000"/>
-                </a:solidFill>
-                <a:latin typeface="Consolas"/>
-              </a:rPr>
-              <a:t>critico</a:t>
-            </a:r>
-            <a:r>
-              <a:rPr lang="pt-BR" sz="1900" b="1" dirty="0">
-                <a:solidFill>
-                  <a:srgbClr val="FFC000"/>
-                </a:solidFill>
-                <a:latin typeface="Consolas"/>
-              </a:rPr>
-              <a:t>:</a:t>
-            </a:r>
-            <a:r>
-              <a:rPr lang="pt-BR" sz="1900" dirty="0"/>
-              <a:t> Junta (</a:t>
-            </a:r>
-            <a:r>
-              <a:rPr lang="pt-BR" sz="1900" i="1" dirty="0"/>
-              <a:t>merge</a:t>
-            </a:r>
-            <a:r>
-              <a:rPr lang="pt-BR" sz="1900" dirty="0"/>
-              <a:t>) a correção feita na </a:t>
-            </a:r>
-            <a:r>
-              <a:rPr lang="pt-BR" sz="1900" err="1"/>
-              <a:t>branch</a:t>
-            </a:r>
-            <a:r>
-              <a:rPr lang="pt-BR" sz="1900" dirty="0"/>
-              <a:t> de </a:t>
-            </a:r>
-            <a:r>
-              <a:rPr lang="pt-BR" sz="1900" err="1"/>
-              <a:t>hotfix</a:t>
-            </a:r>
-            <a:endParaRPr lang="pt-BR" sz="1900"/>
           </a:p>
         </p:txBody>
       </p:sp>
     </p:spTree>
     <p:extLst>
       <p:ext uri="{BB962C8B-B14F-4D97-AF65-F5344CB8AC3E}">
-        <p14:creationId xmlns:p14="http://schemas.microsoft.com/office/powerpoint/2010/main" val="2278136201"/>
+        <p14:creationId xmlns:p14="http://schemas.microsoft.com/office/powerpoint/2010/main" val="965797971"/>
       </p:ext>
     </p:extLst>
   </p:cSld>
@@ -10417,7 +10115,7 @@
           <p:cNvPr id="2" name="Título 1">
             <a:extLst>
               <a:ext uri="{FF2B5EF4-FFF2-40B4-BE49-F238E27FC236}">
-                <a16:creationId xmlns:a16="http://schemas.microsoft.com/office/drawing/2014/main" id="{EBA43D66-D1A5-D712-35D2-EC7476137982}"/>
+                <a16:creationId xmlns:a16="http://schemas.microsoft.com/office/drawing/2014/main" id="{C74898F8-305F-289F-ECED-47C00F3A435A}"/>
               </a:ext>
             </a:extLst>
           </p:cNvPr>
@@ -10445,7 +10143,7 @@
           <p:cNvPr id="3" name="Espaço Reservado para Conteúdo 2">
             <a:extLst>
               <a:ext uri="{FF2B5EF4-FFF2-40B4-BE49-F238E27FC236}">
-                <a16:creationId xmlns:a16="http://schemas.microsoft.com/office/drawing/2014/main" id="{68AE4F73-8AE1-B869-AD7A-6EA2A99A1AA0}"/>
+                <a16:creationId xmlns:a16="http://schemas.microsoft.com/office/drawing/2014/main" id="{3681C089-4161-E596-39A7-053DCC55AC19}"/>
               </a:ext>
             </a:extLst>
           </p:cNvPr>
@@ -10459,45 +10157,153 @@
         <p:spPr/>
         <p:txBody>
           <a:bodyPr vert="horz" lIns="91440" tIns="45720" rIns="91440" bIns="45720" rtlCol="0" anchor="t">
-            <a:normAutofit/>
+            <a:normAutofit fontScale="92500" lnSpcReduction="10000"/>
           </a:bodyPr>
           <a:lstStyle/>
           <a:p>
-            <a:pPr indent="0">
-              <a:buNone/>
-            </a:pPr>
-            <a:endParaRPr lang="en-US" sz="800" dirty="0"/>
-          </a:p>
-          <a:p>
             <a:pPr marL="0" indent="0">
               <a:buNone/>
             </a:pPr>
-            <a:endParaRPr lang="pt-BR" sz="800" dirty="0"/>
+            <a:r>
+              <a:rPr lang="pt-BR" dirty="0"/>
+              <a:t>Voltando ao problema do </a:t>
+            </a:r>
+            <a:r>
+              <a:rPr lang="pt-BR"/>
+              <a:t>início</a:t>
+            </a:r>
+            <a:r>
+              <a:rPr lang="pt-BR" dirty="0"/>
+              <a:t> da apresentação:</a:t>
+            </a:r>
+          </a:p>
+          <a:p>
+            <a:pPr marL="0" indent="0">
+              <a:buNone/>
+            </a:pPr>
+            <a:endParaRPr lang="pt-BR" dirty="0"/>
+          </a:p>
+          <a:p>
+            <a:pPr marL="0" indent="0">
+              <a:buNone/>
+            </a:pPr>
+            <a:r>
+              <a:rPr lang="pt-BR"/>
+              <a:t>Aqui estão os passos que serão seguidos para resolver o problema:</a:t>
+            </a:r>
+          </a:p>
+          <a:p>
+            <a:pPr marL="0" indent="0">
+              <a:buNone/>
+            </a:pPr>
+            <a:endParaRPr lang="pt-BR" dirty="0"/>
+          </a:p>
+          <a:p>
+            <a:pPr marL="0" indent="0">
+              <a:buNone/>
+            </a:pPr>
+            <a:r>
+              <a:rPr lang="pt-BR" sz="1900"/>
+              <a:t>1. Salvar temporariamente o que você está fazendo</a:t>
+            </a:r>
           </a:p>
           <a:p>
             <a:pPr>
               <a:buNone/>
             </a:pPr>
             <a:r>
-              <a:rPr lang="pt-BR" dirty="0"/>
-              <a:t>6.(Opcional) Apagar a </a:t>
-            </a:r>
-            <a:r>
-              <a:rPr lang="pt-BR" dirty="0" err="1"/>
+              <a:rPr lang="pt-BR" sz="1700" b="1" dirty="0" err="1">
+                <a:solidFill>
+                  <a:srgbClr val="FFC000"/>
+                </a:solidFill>
+                <a:latin typeface="Consolas"/>
+              </a:rPr>
+              <a:t>git</a:t>
+            </a:r>
+            <a:r>
+              <a:rPr lang="pt-BR" sz="1700" b="1" dirty="0">
+                <a:solidFill>
+                  <a:srgbClr val="FFC000"/>
+                </a:solidFill>
+                <a:latin typeface="Consolas"/>
+              </a:rPr>
+              <a:t> </a:t>
+            </a:r>
+            <a:r>
+              <a:rPr lang="pt-BR" sz="1700" b="1" dirty="0" err="1">
+                <a:solidFill>
+                  <a:srgbClr val="FFC000"/>
+                </a:solidFill>
+                <a:latin typeface="Consolas"/>
+              </a:rPr>
+              <a:t>stash</a:t>
+            </a:r>
+            <a:r>
+              <a:rPr lang="pt-BR" sz="1700" dirty="0">
+                <a:ea typeface="+mn-lt"/>
+                <a:cs typeface="+mn-lt"/>
+              </a:rPr>
+              <a:t> </a:t>
+            </a:r>
+            <a:r>
+              <a:rPr lang="pt-BR" sz="1700" b="1" dirty="0">
+                <a:ea typeface="+mn-lt"/>
+                <a:cs typeface="+mn-lt"/>
+              </a:rPr>
+              <a:t>: </a:t>
+            </a:r>
+            <a:r>
+              <a:rPr lang="pt-BR" sz="1700" dirty="0">
+                <a:ea typeface="+mn-lt"/>
+                <a:cs typeface="+mn-lt"/>
+              </a:rPr>
+              <a:t>Guarda temporariamente suas alterações não </a:t>
+            </a:r>
+            <a:r>
+              <a:rPr lang="pt-BR" sz="1700" dirty="0" err="1">
+                <a:ea typeface="+mn-lt"/>
+                <a:cs typeface="+mn-lt"/>
+              </a:rPr>
+              <a:t>confirmadas  e</a:t>
+            </a:r>
+            <a:r>
+              <a:rPr lang="pt-BR" sz="1700" dirty="0">
+                <a:ea typeface="+mn-lt"/>
+                <a:cs typeface="+mn-lt"/>
+              </a:rPr>
+              <a:t> limpa o diretório de trabalho, permitindo mudar de contexto sem perder nada.</a:t>
+            </a:r>
+            <a:endParaRPr lang="pt-BR" sz="1700"/>
+          </a:p>
+          <a:p>
+            <a:pPr>
+              <a:buNone/>
+            </a:pPr>
+            <a:endParaRPr lang="pt-BR" dirty="0"/>
+          </a:p>
+          <a:p>
+            <a:pPr>
+              <a:buNone/>
+            </a:pPr>
+            <a:r>
+              <a:rPr lang="pt-BR" sz="1900" dirty="0"/>
+              <a:t>2. Voltar para a </a:t>
+            </a:r>
+            <a:r>
+              <a:rPr lang="pt-BR" sz="1900" dirty="0" err="1"/>
               <a:t>branch</a:t>
             </a:r>
             <a:r>
-              <a:rPr lang="pt-BR" dirty="0"/>
-              <a:t> de correção</a:t>
-            </a:r>
-            <a:endParaRPr lang="en-US"/>
+              <a:rPr lang="pt-BR" sz="1900" dirty="0"/>
+              <a:t> principal</a:t>
+            </a:r>
           </a:p>
           <a:p>
             <a:pPr>
               <a:buNone/>
             </a:pPr>
             <a:r>
-              <a:rPr lang="pt-BR" sz="1600" b="1" dirty="0" err="1">
+              <a:rPr lang="pt-BR" sz="1700" b="1" err="1">
                 <a:solidFill>
                   <a:srgbClr val="FFC000"/>
                 </a:solidFill>
@@ -10506,196 +10312,71 @@
               <a:t>git</a:t>
             </a:r>
             <a:r>
-              <a:rPr lang="pt-BR" sz="1600" b="1" dirty="0">
+              <a:rPr lang="pt-BR" sz="1700" b="1" dirty="0">
                 <a:solidFill>
                   <a:srgbClr val="FFC000"/>
                 </a:solidFill>
                 <a:latin typeface="Consolas"/>
               </a:rPr>
-              <a:t> </a:t>
-            </a:r>
-            <a:r>
-              <a:rPr lang="pt-BR" sz="1600" b="1" dirty="0" err="1">
+              <a:t> checkout </a:t>
+            </a:r>
+            <a:r>
+              <a:rPr lang="pt-BR" sz="1700" b="1" err="1">
                 <a:solidFill>
                   <a:srgbClr val="FFC000"/>
                 </a:solidFill>
                 <a:latin typeface="Consolas"/>
               </a:rPr>
+              <a:t>main</a:t>
+            </a:r>
+            <a:r>
+              <a:rPr lang="pt-BR" sz="1700" b="1" dirty="0">
+                <a:ea typeface="+mn-lt"/>
+                <a:cs typeface="+mn-lt"/>
+              </a:rPr>
+              <a:t>: </a:t>
+            </a:r>
+            <a:r>
+              <a:rPr lang="pt-BR" sz="1700" dirty="0">
+                <a:ea typeface="+mn-lt"/>
+                <a:cs typeface="+mn-lt"/>
+              </a:rPr>
+              <a:t>Muda para a </a:t>
+            </a:r>
+            <a:r>
+              <a:rPr lang="pt-BR" sz="1700" err="1">
+                <a:ea typeface="+mn-lt"/>
+                <a:cs typeface="+mn-lt"/>
+              </a:rPr>
               <a:t>branch</a:t>
             </a:r>
             <a:r>
-              <a:rPr lang="pt-BR" sz="1600" b="1" dirty="0">
-                <a:solidFill>
-                  <a:srgbClr val="FFC000"/>
-                </a:solidFill>
-                <a:latin typeface="Consolas"/>
-              </a:rPr>
-              <a:t> -d </a:t>
-            </a:r>
-            <a:r>
-              <a:rPr lang="pt-BR" sz="1600" b="1" dirty="0" err="1">
-                <a:solidFill>
-                  <a:srgbClr val="FFC000"/>
-                </a:solidFill>
-                <a:latin typeface="Consolas"/>
-              </a:rPr>
-              <a:t>hotfix</a:t>
-            </a:r>
-            <a:r>
-              <a:rPr lang="pt-BR" sz="1600" b="1" dirty="0">
-                <a:solidFill>
-                  <a:srgbClr val="FFC000"/>
-                </a:solidFill>
-                <a:latin typeface="Consolas"/>
-              </a:rPr>
-              <a:t>-erro-</a:t>
-            </a:r>
-            <a:r>
-              <a:rPr lang="pt-BR" sz="1600" b="1" dirty="0" err="1">
-                <a:solidFill>
-                  <a:srgbClr val="FFC000"/>
-                </a:solidFill>
-                <a:latin typeface="Consolas"/>
-              </a:rPr>
-              <a:t>critico</a:t>
-            </a:r>
-            <a:r>
-              <a:rPr lang="pt-BR" sz="1600" dirty="0">
-                <a:latin typeface="Century Gothic"/>
-              </a:rPr>
-              <a:t>: Remove</a:t>
-            </a:r>
-            <a:r>
-              <a:rPr lang="pt-BR" sz="1600" dirty="0"/>
-              <a:t> a </a:t>
-            </a:r>
-            <a:r>
-              <a:rPr lang="pt-BR" sz="1600" dirty="0" err="1"/>
-              <a:t>branch</a:t>
-            </a:r>
-            <a:r>
-              <a:rPr lang="pt-BR" sz="1600" dirty="0"/>
-              <a:t> temporária após o uso.</a:t>
-            </a:r>
-            <a:br>
-              <a:rPr lang="en-US" sz="1600" dirty="0"/>
-            </a:br>
-            <a:endParaRPr lang="en-US" sz="1600">
-              <a:latin typeface="Century Gothic"/>
-              <a:ea typeface="Calibri"/>
-              <a:cs typeface="Calibri"/>
-            </a:endParaRPr>
+              <a:rPr lang="pt-BR" sz="1700" dirty="0">
+                <a:ea typeface="+mn-lt"/>
+                <a:cs typeface="+mn-lt"/>
+              </a:rPr>
+              <a:t> principal do projeto, onde está o </a:t>
+            </a:r>
+            <a:r>
+              <a:rPr lang="pt-BR" sz="1700">
+                <a:ea typeface="+mn-lt"/>
+                <a:cs typeface="+mn-lt"/>
+              </a:rPr>
+              <a:t>código “oficial</a:t>
+            </a:r>
+            <a:r>
+              <a:rPr lang="pt-BR" sz="1700" dirty="0">
+                <a:ea typeface="+mn-lt"/>
+                <a:cs typeface="+mn-lt"/>
+              </a:rPr>
+              <a:t>”.</a:t>
+            </a:r>
+            <a:endParaRPr lang="pt-BR" sz="1700" dirty="0"/>
           </a:p>
           <a:p>
             <a:pPr>
               <a:buNone/>
             </a:pPr>
-            <a:r>
-              <a:rPr lang="pt-BR" sz="1600" dirty="0"/>
-              <a:t> </a:t>
-            </a:r>
-            <a:r>
-              <a:rPr lang="pt-BR"/>
-              <a:t>7. Voltar ao que você estava fazendo antes</a:t>
-            </a:r>
-            <a:endParaRPr lang="en-US"/>
-          </a:p>
-          <a:p>
-            <a:pPr>
-              <a:buNone/>
-            </a:pPr>
-            <a:r>
-              <a:rPr lang="pt-BR" sz="1600" b="1" dirty="0" err="1">
-                <a:solidFill>
-                  <a:srgbClr val="FFC000"/>
-                </a:solidFill>
-                <a:latin typeface="Consolas"/>
-              </a:rPr>
-              <a:t>git</a:t>
-            </a:r>
-            <a:r>
-              <a:rPr lang="pt-BR" sz="1600" b="1" dirty="0">
-                <a:solidFill>
-                  <a:srgbClr val="FFC000"/>
-                </a:solidFill>
-                <a:latin typeface="Consolas"/>
-              </a:rPr>
-              <a:t> checkout sua-</a:t>
-            </a:r>
-            <a:r>
-              <a:rPr lang="pt-BR" sz="1600" b="1" dirty="0" err="1">
-                <a:solidFill>
-                  <a:srgbClr val="FFC000"/>
-                </a:solidFill>
-                <a:latin typeface="Consolas"/>
-              </a:rPr>
-              <a:t>branch</a:t>
-            </a:r>
-            <a:r>
-              <a:rPr lang="pt-BR" sz="1600" dirty="0">
-                <a:latin typeface="Century Gothic"/>
-              </a:rPr>
-              <a:t>: Retorna para sua </a:t>
-            </a:r>
-            <a:r>
-              <a:rPr lang="pt-BR" sz="1600" dirty="0" err="1">
-                <a:latin typeface="Century Gothic"/>
-              </a:rPr>
-              <a:t>branch</a:t>
-            </a:r>
-            <a:r>
-              <a:rPr lang="pt-BR" sz="1600" dirty="0">
-                <a:latin typeface="Century Gothic"/>
-              </a:rPr>
-              <a:t> de desenvolvimento </a:t>
-            </a:r>
-          </a:p>
-          <a:p>
-            <a:pPr>
-              <a:buNone/>
-            </a:pPr>
-            <a:r>
-              <a:rPr lang="pt-BR" sz="1600" b="1" dirty="0" err="1">
-                <a:solidFill>
-                  <a:srgbClr val="FFC000"/>
-                </a:solidFill>
-                <a:latin typeface="Consolas"/>
-              </a:rPr>
-              <a:t>git</a:t>
-            </a:r>
-            <a:r>
-              <a:rPr lang="pt-BR" sz="1600" b="1" dirty="0">
-                <a:solidFill>
-                  <a:srgbClr val="FFC000"/>
-                </a:solidFill>
-                <a:latin typeface="Consolas"/>
-              </a:rPr>
-              <a:t> </a:t>
-            </a:r>
-            <a:r>
-              <a:rPr lang="pt-BR" sz="1600" b="1" dirty="0" err="1">
-                <a:solidFill>
-                  <a:srgbClr val="FFC000"/>
-                </a:solidFill>
-                <a:latin typeface="Consolas"/>
-              </a:rPr>
-              <a:t>stash</a:t>
-            </a:r>
-            <a:r>
-              <a:rPr lang="pt-BR" sz="1600" b="1" dirty="0">
-                <a:solidFill>
-                  <a:srgbClr val="FFC000"/>
-                </a:solidFill>
-                <a:latin typeface="Consolas"/>
-              </a:rPr>
-              <a:t> pop</a:t>
-            </a:r>
-            <a:r>
-              <a:rPr lang="pt-BR" sz="1600" dirty="0">
-                <a:latin typeface="Century Gothic"/>
-              </a:rPr>
-              <a:t>: recupera o que você estava fazendo antes </a:t>
-            </a:r>
             <a:endParaRPr lang="pt-BR" dirty="0"/>
           </a:p>
         </p:txBody>
@@ -10703,7 +10384,7 @@
     </p:spTree>
     <p:extLst>
       <p:ext uri="{BB962C8B-B14F-4D97-AF65-F5344CB8AC3E}">
-        <p14:creationId xmlns:p14="http://schemas.microsoft.com/office/powerpoint/2010/main" val="2842962354"/>
+        <p14:creationId xmlns:p14="http://schemas.microsoft.com/office/powerpoint/2010/main" val="2204593060"/>
       </p:ext>
     </p:extLst>
   </p:cSld>
@@ -11032,6 +10713,919 @@
           <p:cNvPr id="2" name="Título 1">
             <a:extLst>
               <a:ext uri="{FF2B5EF4-FFF2-40B4-BE49-F238E27FC236}">
+                <a16:creationId xmlns:a16="http://schemas.microsoft.com/office/drawing/2014/main" id="{B030202A-434E-C143-E16A-301CE0C409B3}"/>
+              </a:ext>
+            </a:extLst>
+          </p:cNvPr>
+          <p:cNvSpPr>
+            <a:spLocks noGrp="1"/>
+          </p:cNvSpPr>
+          <p:nvPr>
+            <p:ph type="title"/>
+          </p:nvPr>
+        </p:nvSpPr>
+        <p:spPr/>
+        <p:txBody>
+          <a:bodyPr/>
+          <a:lstStyle/>
+          <a:p>
+            <a:r>
+              <a:rPr lang="pt-BR"/>
+              <a:t>Exemplo prático</a:t>
+            </a:r>
+          </a:p>
+        </p:txBody>
+      </p:sp>
+      <p:sp>
+        <p:nvSpPr>
+          <p:cNvPr id="3" name="Espaço Reservado para Conteúdo 2">
+            <a:extLst>
+              <a:ext uri="{FF2B5EF4-FFF2-40B4-BE49-F238E27FC236}">
+                <a16:creationId xmlns:a16="http://schemas.microsoft.com/office/drawing/2014/main" id="{90FBAB7E-6A0D-72F8-4557-CF94C58774EF}"/>
+              </a:ext>
+            </a:extLst>
+          </p:cNvPr>
+          <p:cNvSpPr>
+            <a:spLocks noGrp="1"/>
+          </p:cNvSpPr>
+          <p:nvPr>
+            <p:ph idx="1"/>
+          </p:nvPr>
+        </p:nvSpPr>
+        <p:spPr>
+          <a:xfrm>
+            <a:off x="2589212" y="1714500"/>
+            <a:ext cx="8915400" cy="4636337"/>
+          </a:xfrm>
+        </p:spPr>
+        <p:txBody>
+          <a:bodyPr vert="horz" lIns="91440" tIns="45720" rIns="91440" bIns="45720" rtlCol="0" anchor="t">
+            <a:normAutofit/>
+          </a:bodyPr>
+          <a:lstStyle/>
+          <a:p>
+            <a:pPr>
+              <a:buNone/>
+            </a:pPr>
+            <a:r>
+              <a:rPr lang="pt-BR" dirty="0"/>
+              <a:t>3. Criar uma nova </a:t>
+            </a:r>
+            <a:r>
+              <a:rPr lang="pt-BR" dirty="0" err="1"/>
+              <a:t>branch</a:t>
+            </a:r>
+            <a:r>
+              <a:rPr lang="pt-BR" dirty="0"/>
+              <a:t> para corrigir o erro</a:t>
+            </a:r>
+            <a:endParaRPr lang="en-US" dirty="0"/>
+          </a:p>
+          <a:p>
+            <a:pPr marL="0">
+              <a:buNone/>
+            </a:pPr>
+            <a:r>
+              <a:rPr lang="pt-BR" sz="1600" b="1" dirty="0" err="1">
+                <a:solidFill>
+                  <a:srgbClr val="FFC000"/>
+                </a:solidFill>
+                <a:latin typeface="Consolas"/>
+              </a:rPr>
+              <a:t>git</a:t>
+            </a:r>
+            <a:r>
+              <a:rPr lang="pt-BR" sz="1600" b="1" dirty="0">
+                <a:solidFill>
+                  <a:srgbClr val="FFC000"/>
+                </a:solidFill>
+                <a:latin typeface="Consolas"/>
+              </a:rPr>
+              <a:t> checkout -b </a:t>
+            </a:r>
+            <a:r>
+              <a:rPr lang="pt-BR" sz="1600" b="1" dirty="0" err="1">
+                <a:solidFill>
+                  <a:srgbClr val="FFC000"/>
+                </a:solidFill>
+                <a:latin typeface="Consolas"/>
+              </a:rPr>
+              <a:t>hotfix</a:t>
+            </a:r>
+            <a:r>
+              <a:rPr lang="pt-BR" sz="1600" b="1" dirty="0">
+                <a:solidFill>
+                  <a:srgbClr val="FFC000"/>
+                </a:solidFill>
+                <a:latin typeface="Consolas"/>
+              </a:rPr>
+              <a:t>-erro-</a:t>
+            </a:r>
+            <a:r>
+              <a:rPr lang="pt-BR" sz="1600" b="1" dirty="0" err="1">
+                <a:solidFill>
+                  <a:srgbClr val="FFC000"/>
+                </a:solidFill>
+                <a:latin typeface="Consolas"/>
+              </a:rPr>
+              <a:t>critico</a:t>
+            </a:r>
+            <a:r>
+              <a:rPr lang="pt-BR" sz="1600" b="1" dirty="0">
+                <a:solidFill>
+                  <a:srgbClr val="FFC000"/>
+                </a:solidFill>
+                <a:latin typeface="Consolas"/>
+              </a:rPr>
+              <a:t>:</a:t>
+            </a:r>
+            <a:r>
+              <a:rPr lang="pt-BR" sz="1600" b="1" dirty="0"/>
+              <a:t> </a:t>
+            </a:r>
+            <a:r>
+              <a:rPr lang="pt-BR" sz="1600" dirty="0"/>
+              <a:t>Cria e já muda para uma nova </a:t>
+            </a:r>
+            <a:r>
+              <a:rPr lang="pt-BR" sz="1600" dirty="0" err="1"/>
+              <a:t>branch</a:t>
+            </a:r>
+            <a:r>
+              <a:rPr lang="pt-BR" sz="1600" dirty="0"/>
+              <a:t>. Isso isola a correção sem afetar o código principal diretamente.</a:t>
+            </a:r>
+          </a:p>
+          <a:p>
+            <a:pPr>
+              <a:buNone/>
+            </a:pPr>
+            <a:endParaRPr lang="pt-BR" sz="1600" dirty="0"/>
+          </a:p>
+          <a:p>
+            <a:pPr>
+              <a:buNone/>
+            </a:pPr>
+            <a:r>
+              <a:rPr lang="pt-BR"/>
+              <a:t>4. Corrigir o erro e salvar</a:t>
+            </a:r>
+            <a:endParaRPr lang="en-US" dirty="0"/>
+          </a:p>
+          <a:p>
+            <a:pPr>
+              <a:buNone/>
+            </a:pPr>
+            <a:r>
+              <a:rPr lang="pt-BR" sz="1600" b="1" dirty="0" err="1">
+                <a:solidFill>
+                  <a:srgbClr val="FFC000"/>
+                </a:solidFill>
+                <a:latin typeface="Consolas"/>
+              </a:rPr>
+              <a:t>git</a:t>
+            </a:r>
+            <a:r>
+              <a:rPr lang="pt-BR" sz="1600" b="1" dirty="0">
+                <a:solidFill>
+                  <a:srgbClr val="FFC000"/>
+                </a:solidFill>
+                <a:latin typeface="Consolas"/>
+              </a:rPr>
+              <a:t> </a:t>
+            </a:r>
+            <a:r>
+              <a:rPr lang="pt-BR" sz="1600" b="1" dirty="0" err="1">
+                <a:solidFill>
+                  <a:srgbClr val="FFC000"/>
+                </a:solidFill>
+                <a:latin typeface="Consolas"/>
+              </a:rPr>
+              <a:t>add</a:t>
+            </a:r>
+            <a:r>
+              <a:rPr lang="pt-BR" sz="1600" b="1" dirty="0">
+                <a:solidFill>
+                  <a:srgbClr val="FFC000"/>
+                </a:solidFill>
+                <a:latin typeface="Consolas"/>
+              </a:rPr>
+              <a:t>:</a:t>
+            </a:r>
+            <a:r>
+              <a:rPr lang="pt-BR" sz="1600" dirty="0">
+                <a:latin typeface="Century Gothic"/>
+              </a:rPr>
+              <a:t> prepara as alterações para </a:t>
+            </a:r>
+            <a:r>
+              <a:rPr lang="pt-BR" sz="1600" dirty="0" err="1">
+                <a:latin typeface="Century Gothic"/>
+              </a:rPr>
+              <a:t>commit</a:t>
+            </a:r>
+            <a:r>
+              <a:rPr lang="pt-BR" sz="1600" dirty="0">
+                <a:latin typeface="Century Gothic"/>
+              </a:rPr>
+              <a:t> </a:t>
+            </a:r>
+          </a:p>
+          <a:p>
+            <a:pPr>
+              <a:buNone/>
+            </a:pPr>
+            <a:r>
+              <a:rPr lang="pt-BR" sz="1600" b="1" dirty="0" err="1">
+                <a:solidFill>
+                  <a:srgbClr val="FFC000"/>
+                </a:solidFill>
+                <a:latin typeface="Consolas"/>
+              </a:rPr>
+              <a:t>git</a:t>
+            </a:r>
+            <a:r>
+              <a:rPr lang="pt-BR" sz="1600" b="1" dirty="0">
+                <a:solidFill>
+                  <a:srgbClr val="FFC000"/>
+                </a:solidFill>
+                <a:latin typeface="Consolas"/>
+              </a:rPr>
+              <a:t> </a:t>
+            </a:r>
+            <a:r>
+              <a:rPr lang="pt-BR" sz="1600" b="1" dirty="0" err="1">
+                <a:solidFill>
+                  <a:srgbClr val="FFC000"/>
+                </a:solidFill>
+                <a:latin typeface="Consolas"/>
+              </a:rPr>
+              <a:t>commit</a:t>
+            </a:r>
+            <a:r>
+              <a:rPr lang="pt-BR" sz="1600" b="1" dirty="0">
+                <a:solidFill>
+                  <a:srgbClr val="FFC000"/>
+                </a:solidFill>
+                <a:latin typeface="Consolas"/>
+              </a:rPr>
+              <a:t> -m "Corrige erro crítico</a:t>
+            </a:r>
+            <a:r>
+              <a:rPr lang="pt-BR" sz="1600" dirty="0">
+                <a:latin typeface="Century Gothic"/>
+              </a:rPr>
+              <a:t>": salva a correção no histórico </a:t>
+            </a:r>
+          </a:p>
+          <a:p>
+            <a:pPr indent="0">
+              <a:buNone/>
+            </a:pPr>
+            <a:endParaRPr lang="en-US" sz="1600" dirty="0"/>
+          </a:p>
+          <a:p>
+            <a:pPr>
+              <a:buNone/>
+            </a:pPr>
+            <a:r>
+              <a:rPr lang="pt-BR" dirty="0"/>
+              <a:t>5. Aplicar a correção na </a:t>
+            </a:r>
+            <a:r>
+              <a:rPr lang="pt-BR" dirty="0" err="1"/>
+              <a:t>branch</a:t>
+            </a:r>
+            <a:r>
+              <a:rPr lang="pt-BR" dirty="0"/>
+              <a:t> principal</a:t>
+            </a:r>
+            <a:endParaRPr lang="en-US" dirty="0"/>
+          </a:p>
+          <a:p>
+            <a:pPr>
+              <a:buNone/>
+            </a:pPr>
+            <a:r>
+              <a:rPr lang="pt-BR" sz="1600" b="1" dirty="0" err="1">
+                <a:solidFill>
+                  <a:srgbClr val="FFC000"/>
+                </a:solidFill>
+                <a:latin typeface="Consolas"/>
+              </a:rPr>
+              <a:t>git</a:t>
+            </a:r>
+            <a:r>
+              <a:rPr lang="pt-BR" sz="1600" b="1" dirty="0">
+                <a:solidFill>
+                  <a:srgbClr val="FFC000"/>
+                </a:solidFill>
+                <a:latin typeface="Consolas"/>
+              </a:rPr>
+              <a:t> checkout </a:t>
+            </a:r>
+            <a:r>
+              <a:rPr lang="pt-BR" sz="1600" b="1" dirty="0" err="1">
+                <a:solidFill>
+                  <a:srgbClr val="FFC000"/>
+                </a:solidFill>
+                <a:latin typeface="Consolas"/>
+              </a:rPr>
+              <a:t>main</a:t>
+            </a:r>
+            <a:r>
+              <a:rPr lang="pt-BR" sz="1600" b="1" dirty="0">
+                <a:solidFill>
+                  <a:srgbClr val="FFC000"/>
+                </a:solidFill>
+                <a:latin typeface="Consolas"/>
+              </a:rPr>
+              <a:t>:</a:t>
+            </a:r>
+            <a:r>
+              <a:rPr lang="pt-BR" sz="1600" dirty="0"/>
+              <a:t> Volta para a </a:t>
+            </a:r>
+            <a:r>
+              <a:rPr lang="pt-BR" sz="1600" dirty="0" err="1"/>
+              <a:t>branch</a:t>
+            </a:r>
+            <a:r>
+              <a:rPr lang="pt-BR" sz="1600" dirty="0"/>
+              <a:t> principal</a:t>
+            </a:r>
+            <a:endParaRPr lang="en-US" sz="1600" dirty="0"/>
+          </a:p>
+          <a:p>
+            <a:pPr>
+              <a:buNone/>
+            </a:pPr>
+            <a:r>
+              <a:rPr lang="pt-BR" sz="1600" b="1" dirty="0" err="1">
+                <a:solidFill>
+                  <a:srgbClr val="FFC000"/>
+                </a:solidFill>
+                <a:latin typeface="Consolas"/>
+              </a:rPr>
+              <a:t>git</a:t>
+            </a:r>
+            <a:r>
+              <a:rPr lang="pt-BR" sz="1600" b="1" dirty="0">
+                <a:solidFill>
+                  <a:srgbClr val="FFC000"/>
+                </a:solidFill>
+                <a:latin typeface="Consolas"/>
+              </a:rPr>
+              <a:t> merge </a:t>
+            </a:r>
+            <a:r>
+              <a:rPr lang="pt-BR" sz="1600" b="1" dirty="0" err="1">
+                <a:solidFill>
+                  <a:srgbClr val="FFC000"/>
+                </a:solidFill>
+                <a:latin typeface="Consolas"/>
+              </a:rPr>
+              <a:t>hotfix</a:t>
+            </a:r>
+            <a:r>
+              <a:rPr lang="pt-BR" sz="1600" b="1" dirty="0">
+                <a:solidFill>
+                  <a:srgbClr val="FFC000"/>
+                </a:solidFill>
+                <a:latin typeface="Consolas"/>
+              </a:rPr>
+              <a:t>-erro-</a:t>
+            </a:r>
+            <a:r>
+              <a:rPr lang="pt-BR" sz="1600" b="1" dirty="0" err="1">
+                <a:solidFill>
+                  <a:srgbClr val="FFC000"/>
+                </a:solidFill>
+                <a:latin typeface="Consolas"/>
+              </a:rPr>
+              <a:t>critico</a:t>
+            </a:r>
+            <a:r>
+              <a:rPr lang="pt-BR" sz="1600" b="1" dirty="0">
+                <a:solidFill>
+                  <a:srgbClr val="FFC000"/>
+                </a:solidFill>
+                <a:latin typeface="Consolas"/>
+              </a:rPr>
+              <a:t>:</a:t>
+            </a:r>
+            <a:r>
+              <a:rPr lang="pt-BR" sz="1600" dirty="0"/>
+              <a:t> Junta (</a:t>
+            </a:r>
+            <a:r>
+              <a:rPr lang="pt-BR" sz="1600" i="1" dirty="0"/>
+              <a:t>merge</a:t>
+            </a:r>
+            <a:r>
+              <a:rPr lang="pt-BR" sz="1600" dirty="0"/>
+              <a:t>) a correção feita na </a:t>
+            </a:r>
+            <a:r>
+              <a:rPr lang="pt-BR" sz="1600" dirty="0" err="1"/>
+              <a:t>branch</a:t>
+            </a:r>
+            <a:r>
+              <a:rPr lang="pt-BR" sz="1600" dirty="0"/>
+              <a:t> de </a:t>
+            </a:r>
+            <a:r>
+              <a:rPr lang="pt-BR" sz="1600" dirty="0" err="1"/>
+              <a:t>hotfix</a:t>
+            </a:r>
+            <a:endParaRPr lang="pt-BR" sz="1600" dirty="0"/>
+          </a:p>
+        </p:txBody>
+      </p:sp>
+      <p:pic>
+        <p:nvPicPr>
+          <p:cNvPr id="4" name="Imagem 3">
+            <a:extLst>
+              <a:ext uri="{FF2B5EF4-FFF2-40B4-BE49-F238E27FC236}">
+                <a16:creationId xmlns:a16="http://schemas.microsoft.com/office/drawing/2014/main" id="{6DAD216A-87BE-8598-A6F8-687228701E53}"/>
+              </a:ext>
+            </a:extLst>
+          </p:cNvPr>
+          <p:cNvPicPr>
+            <a:picLocks noChangeAspect="1"/>
+          </p:cNvPicPr>
+          <p:nvPr/>
+        </p:nvPicPr>
+        <p:blipFill>
+          <a:blip r:embed="rId2"/>
+          <a:stretch>
+            <a:fillRect/>
+          </a:stretch>
+        </p:blipFill>
+        <p:spPr>
+          <a:xfrm>
+            <a:off x="2592388" y="5803900"/>
+            <a:ext cx="7007225" cy="431800"/>
+          </a:xfrm>
+          <a:prstGeom prst="rect">
+            <a:avLst/>
+          </a:prstGeom>
+        </p:spPr>
+      </p:pic>
+      <p:pic>
+        <p:nvPicPr>
+          <p:cNvPr id="5" name="Imagem 4">
+            <a:extLst>
+              <a:ext uri="{FF2B5EF4-FFF2-40B4-BE49-F238E27FC236}">
+                <a16:creationId xmlns:a16="http://schemas.microsoft.com/office/drawing/2014/main" id="{6D6E164E-5CC0-4767-0F1B-B1056E3F76BC}"/>
+              </a:ext>
+            </a:extLst>
+          </p:cNvPr>
+          <p:cNvPicPr>
+            <a:picLocks noChangeAspect="1"/>
+          </p:cNvPicPr>
+          <p:nvPr/>
+        </p:nvPicPr>
+        <p:blipFill>
+          <a:blip r:embed="rId3"/>
+          <a:stretch>
+            <a:fillRect/>
+          </a:stretch>
+        </p:blipFill>
+        <p:spPr>
+          <a:xfrm>
+            <a:off x="2587625" y="2730500"/>
+            <a:ext cx="6546850" cy="406400"/>
+          </a:xfrm>
+          <a:prstGeom prst="rect">
+            <a:avLst/>
+          </a:prstGeom>
+        </p:spPr>
+      </p:pic>
+    </p:spTree>
+    <p:extLst>
+      <p:ext uri="{BB962C8B-B14F-4D97-AF65-F5344CB8AC3E}">
+        <p14:creationId xmlns:p14="http://schemas.microsoft.com/office/powerpoint/2010/main" val="2278136201"/>
+      </p:ext>
+    </p:extLst>
+  </p:cSld>
+  <p:clrMapOvr>
+    <a:masterClrMapping/>
+  </p:clrMapOvr>
+</p:sld>
+</file>
+
+<file path=ppt/slides/slide21.xml><?xml version="1.0" encoding="utf-8"?>
+<p:sld xmlns:a="http://schemas.openxmlformats.org/drawingml/2006/main" xmlns:r="http://schemas.openxmlformats.org/officeDocument/2006/relationships" xmlns:p="http://schemas.openxmlformats.org/presentationml/2006/main">
+  <p:cSld>
+    <p:spTree>
+      <p:nvGrpSpPr>
+        <p:cNvPr id="1" name=""/>
+        <p:cNvGrpSpPr/>
+        <p:nvPr/>
+      </p:nvGrpSpPr>
+      <p:grpSpPr>
+        <a:xfrm>
+          <a:off x="0" y="0"/>
+          <a:ext cx="0" cy="0"/>
+          <a:chOff x="0" y="0"/>
+          <a:chExt cx="0" cy="0"/>
+        </a:xfrm>
+      </p:grpSpPr>
+      <p:sp>
+        <p:nvSpPr>
+          <p:cNvPr id="2" name="Título 1">
+            <a:extLst>
+              <a:ext uri="{FF2B5EF4-FFF2-40B4-BE49-F238E27FC236}">
+                <a16:creationId xmlns:a16="http://schemas.microsoft.com/office/drawing/2014/main" id="{EBA43D66-D1A5-D712-35D2-EC7476137982}"/>
+              </a:ext>
+            </a:extLst>
+          </p:cNvPr>
+          <p:cNvSpPr>
+            <a:spLocks noGrp="1"/>
+          </p:cNvSpPr>
+          <p:nvPr>
+            <p:ph type="title"/>
+          </p:nvPr>
+        </p:nvSpPr>
+        <p:spPr/>
+        <p:txBody>
+          <a:bodyPr/>
+          <a:lstStyle/>
+          <a:p>
+            <a:r>
+              <a:rPr lang="pt-BR"/>
+              <a:t>Exemplo prático</a:t>
+            </a:r>
+          </a:p>
+        </p:txBody>
+      </p:sp>
+      <p:sp>
+        <p:nvSpPr>
+          <p:cNvPr id="3" name="Espaço Reservado para Conteúdo 2">
+            <a:extLst>
+              <a:ext uri="{FF2B5EF4-FFF2-40B4-BE49-F238E27FC236}">
+                <a16:creationId xmlns:a16="http://schemas.microsoft.com/office/drawing/2014/main" id="{68AE4F73-8AE1-B869-AD7A-6EA2A99A1AA0}"/>
+              </a:ext>
+            </a:extLst>
+          </p:cNvPr>
+          <p:cNvSpPr>
+            <a:spLocks noGrp="1"/>
+          </p:cNvSpPr>
+          <p:nvPr>
+            <p:ph idx="1"/>
+          </p:nvPr>
+        </p:nvSpPr>
+        <p:spPr/>
+        <p:txBody>
+          <a:bodyPr vert="horz" lIns="91440" tIns="45720" rIns="91440" bIns="45720" rtlCol="0" anchor="t">
+            <a:normAutofit/>
+          </a:bodyPr>
+          <a:lstStyle/>
+          <a:p>
+            <a:pPr indent="0">
+              <a:buNone/>
+            </a:pPr>
+            <a:endParaRPr lang="en-US" sz="800" dirty="0"/>
+          </a:p>
+          <a:p>
+            <a:pPr marL="0" indent="0">
+              <a:buNone/>
+            </a:pPr>
+            <a:endParaRPr lang="pt-BR" sz="800" dirty="0"/>
+          </a:p>
+          <a:p>
+            <a:pPr>
+              <a:buNone/>
+            </a:pPr>
+            <a:r>
+              <a:rPr lang="pt-BR" dirty="0"/>
+              <a:t>6.(Opcional) Apagar a </a:t>
+            </a:r>
+            <a:r>
+              <a:rPr lang="pt-BR" dirty="0" err="1"/>
+              <a:t>branch</a:t>
+            </a:r>
+            <a:r>
+              <a:rPr lang="pt-BR" dirty="0"/>
+              <a:t> de correção</a:t>
+            </a:r>
+            <a:endParaRPr lang="en-US"/>
+          </a:p>
+          <a:p>
+            <a:pPr>
+              <a:buNone/>
+            </a:pPr>
+            <a:r>
+              <a:rPr lang="pt-BR" sz="1600" b="1" dirty="0" err="1">
+                <a:solidFill>
+                  <a:srgbClr val="FFC000"/>
+                </a:solidFill>
+                <a:latin typeface="Consolas"/>
+              </a:rPr>
+              <a:t>git</a:t>
+            </a:r>
+            <a:r>
+              <a:rPr lang="pt-BR" sz="1600" b="1" dirty="0">
+                <a:solidFill>
+                  <a:srgbClr val="FFC000"/>
+                </a:solidFill>
+                <a:latin typeface="Consolas"/>
+              </a:rPr>
+              <a:t> </a:t>
+            </a:r>
+            <a:r>
+              <a:rPr lang="pt-BR" sz="1600" b="1" dirty="0" err="1">
+                <a:solidFill>
+                  <a:srgbClr val="FFC000"/>
+                </a:solidFill>
+                <a:latin typeface="Consolas"/>
+              </a:rPr>
+              <a:t>branch</a:t>
+            </a:r>
+            <a:r>
+              <a:rPr lang="pt-BR" sz="1600" b="1" dirty="0">
+                <a:solidFill>
+                  <a:srgbClr val="FFC000"/>
+                </a:solidFill>
+                <a:latin typeface="Consolas"/>
+              </a:rPr>
+              <a:t> -d </a:t>
+            </a:r>
+            <a:r>
+              <a:rPr lang="pt-BR" sz="1600" b="1" dirty="0" err="1">
+                <a:solidFill>
+                  <a:srgbClr val="FFC000"/>
+                </a:solidFill>
+                <a:latin typeface="Consolas"/>
+              </a:rPr>
+              <a:t>hotfix</a:t>
+            </a:r>
+            <a:r>
+              <a:rPr lang="pt-BR" sz="1600" b="1" dirty="0">
+                <a:solidFill>
+                  <a:srgbClr val="FFC000"/>
+                </a:solidFill>
+                <a:latin typeface="Consolas"/>
+              </a:rPr>
+              <a:t>-erro-</a:t>
+            </a:r>
+            <a:r>
+              <a:rPr lang="pt-BR" sz="1600" b="1" dirty="0" err="1">
+                <a:solidFill>
+                  <a:srgbClr val="FFC000"/>
+                </a:solidFill>
+                <a:latin typeface="Consolas"/>
+              </a:rPr>
+              <a:t>critico</a:t>
+            </a:r>
+            <a:r>
+              <a:rPr lang="pt-BR" sz="1600" dirty="0">
+                <a:latin typeface="Century Gothic"/>
+              </a:rPr>
+              <a:t>: Remove</a:t>
+            </a:r>
+            <a:r>
+              <a:rPr lang="pt-BR" sz="1600" dirty="0"/>
+              <a:t> a </a:t>
+            </a:r>
+            <a:r>
+              <a:rPr lang="pt-BR" sz="1600" dirty="0" err="1"/>
+              <a:t>branch</a:t>
+            </a:r>
+            <a:r>
+              <a:rPr lang="pt-BR" sz="1600" dirty="0"/>
+              <a:t> temporária após o uso.</a:t>
+            </a:r>
+            <a:br>
+              <a:rPr lang="en-US" sz="1600" dirty="0"/>
+            </a:br>
+            <a:endParaRPr lang="pt-BR" sz="1600">
+              <a:latin typeface="Century Gothic"/>
+              <a:ea typeface="Calibri"/>
+              <a:cs typeface="Calibri"/>
+            </a:endParaRPr>
+          </a:p>
+          <a:p>
+            <a:pPr>
+              <a:buNone/>
+            </a:pPr>
+            <a:endParaRPr lang="en-US" sz="1600" dirty="0"/>
+          </a:p>
+          <a:p>
+            <a:pPr>
+              <a:buNone/>
+            </a:pPr>
+            <a:r>
+              <a:rPr lang="pt-BR" sz="1600" dirty="0"/>
+              <a:t> </a:t>
+            </a:r>
+            <a:r>
+              <a:rPr lang="pt-BR"/>
+              <a:t>7. Voltar ao que você estava fazendo antes</a:t>
+            </a:r>
+            <a:endParaRPr lang="en-US"/>
+          </a:p>
+          <a:p>
+            <a:pPr>
+              <a:buNone/>
+            </a:pPr>
+            <a:r>
+              <a:rPr lang="pt-BR" sz="1600" b="1" dirty="0" err="1">
+                <a:solidFill>
+                  <a:srgbClr val="FFC000"/>
+                </a:solidFill>
+                <a:latin typeface="Consolas"/>
+              </a:rPr>
+              <a:t>git</a:t>
+            </a:r>
+            <a:r>
+              <a:rPr lang="pt-BR" sz="1600" b="1" dirty="0">
+                <a:solidFill>
+                  <a:srgbClr val="FFC000"/>
+                </a:solidFill>
+                <a:latin typeface="Consolas"/>
+              </a:rPr>
+              <a:t> checkout sua-</a:t>
+            </a:r>
+            <a:r>
+              <a:rPr lang="pt-BR" sz="1600" b="1" dirty="0" err="1">
+                <a:solidFill>
+                  <a:srgbClr val="FFC000"/>
+                </a:solidFill>
+                <a:latin typeface="Consolas"/>
+              </a:rPr>
+              <a:t>branch</a:t>
+            </a:r>
+            <a:r>
+              <a:rPr lang="pt-BR" sz="1600" dirty="0">
+                <a:latin typeface="Century Gothic"/>
+              </a:rPr>
+              <a:t>: Retorna para sua </a:t>
+            </a:r>
+            <a:r>
+              <a:rPr lang="pt-BR" sz="1600" dirty="0" err="1">
+                <a:latin typeface="Century Gothic"/>
+              </a:rPr>
+              <a:t>branch</a:t>
+            </a:r>
+            <a:r>
+              <a:rPr lang="pt-BR" sz="1600" dirty="0">
+                <a:latin typeface="Century Gothic"/>
+              </a:rPr>
+              <a:t> de desenvolvimento </a:t>
+            </a:r>
+          </a:p>
+          <a:p>
+            <a:pPr>
+              <a:buNone/>
+            </a:pPr>
+            <a:r>
+              <a:rPr lang="pt-BR" sz="1600" b="1" dirty="0" err="1">
+                <a:solidFill>
+                  <a:srgbClr val="FFC000"/>
+                </a:solidFill>
+                <a:latin typeface="Consolas"/>
+              </a:rPr>
+              <a:t>git</a:t>
+            </a:r>
+            <a:r>
+              <a:rPr lang="pt-BR" sz="1600" b="1" dirty="0">
+                <a:solidFill>
+                  <a:srgbClr val="FFC000"/>
+                </a:solidFill>
+                <a:latin typeface="Consolas"/>
+              </a:rPr>
+              <a:t> </a:t>
+            </a:r>
+            <a:r>
+              <a:rPr lang="pt-BR" sz="1600" b="1" dirty="0" err="1">
+                <a:solidFill>
+                  <a:srgbClr val="FFC000"/>
+                </a:solidFill>
+                <a:latin typeface="Consolas"/>
+              </a:rPr>
+              <a:t>stash</a:t>
+            </a:r>
+            <a:r>
+              <a:rPr lang="pt-BR" sz="1600" b="1" dirty="0">
+                <a:solidFill>
+                  <a:srgbClr val="FFC000"/>
+                </a:solidFill>
+                <a:latin typeface="Consolas"/>
+              </a:rPr>
+              <a:t> pop</a:t>
+            </a:r>
+            <a:r>
+              <a:rPr lang="pt-BR" sz="1600" dirty="0">
+                <a:latin typeface="Century Gothic"/>
+              </a:rPr>
+              <a:t>: recupera o que você estava fazendo antes </a:t>
+            </a:r>
+          </a:p>
+          <a:p>
+            <a:pPr>
+              <a:buNone/>
+            </a:pPr>
+            <a:endParaRPr lang="pt-BR" sz="1600" dirty="0"/>
+          </a:p>
+        </p:txBody>
+      </p:sp>
+      <p:pic>
+        <p:nvPicPr>
+          <p:cNvPr id="4" name="Imagem 3">
+            <a:extLst>
+              <a:ext uri="{FF2B5EF4-FFF2-40B4-BE49-F238E27FC236}">
+                <a16:creationId xmlns:a16="http://schemas.microsoft.com/office/drawing/2014/main" id="{67262795-16FD-912E-D51B-D0F4886137A6}"/>
+              </a:ext>
+            </a:extLst>
+          </p:cNvPr>
+          <p:cNvPicPr>
+            <a:picLocks noChangeAspect="1"/>
+          </p:cNvPicPr>
+          <p:nvPr/>
+        </p:nvPicPr>
+        <p:blipFill>
+          <a:blip r:embed="rId2"/>
+          <a:stretch>
+            <a:fillRect/>
+          </a:stretch>
+        </p:blipFill>
+        <p:spPr>
+          <a:xfrm>
+            <a:off x="2589213" y="3568700"/>
+            <a:ext cx="7699375" cy="457200"/>
+          </a:xfrm>
+          <a:prstGeom prst="rect">
+            <a:avLst/>
+          </a:prstGeom>
+        </p:spPr>
+      </p:pic>
+      <p:pic>
+        <p:nvPicPr>
+          <p:cNvPr id="5" name="Imagem 4">
+            <a:extLst>
+              <a:ext uri="{FF2B5EF4-FFF2-40B4-BE49-F238E27FC236}">
+                <a16:creationId xmlns:a16="http://schemas.microsoft.com/office/drawing/2014/main" id="{83FB2147-BCBA-666A-EE9A-4EC48FE0CF54}"/>
+              </a:ext>
+            </a:extLst>
+          </p:cNvPr>
+          <p:cNvPicPr>
+            <a:picLocks noChangeAspect="1"/>
+          </p:cNvPicPr>
+          <p:nvPr/>
+        </p:nvPicPr>
+        <p:blipFill>
+          <a:blip r:embed="rId3"/>
+          <a:stretch>
+            <a:fillRect/>
+          </a:stretch>
+        </p:blipFill>
+        <p:spPr>
+          <a:xfrm>
+            <a:off x="2587625" y="5378450"/>
+            <a:ext cx="7702550" cy="520700"/>
+          </a:xfrm>
+          <a:prstGeom prst="rect">
+            <a:avLst/>
+          </a:prstGeom>
+        </p:spPr>
+      </p:pic>
+    </p:spTree>
+    <p:extLst>
+      <p:ext uri="{BB962C8B-B14F-4D97-AF65-F5344CB8AC3E}">
+        <p14:creationId xmlns:p14="http://schemas.microsoft.com/office/powerpoint/2010/main" val="2842962354"/>
+      </p:ext>
+    </p:extLst>
+  </p:cSld>
+  <p:clrMapOvr>
+    <a:masterClrMapping/>
+  </p:clrMapOvr>
+</p:sld>
+</file>
+
+<file path=ppt/slides/slide22.xml><?xml version="1.0" encoding="utf-8"?>
+<p:sld xmlns:a="http://schemas.openxmlformats.org/drawingml/2006/main" xmlns:r="http://schemas.openxmlformats.org/officeDocument/2006/relationships" xmlns:p="http://schemas.openxmlformats.org/presentationml/2006/main">
+  <p:cSld>
+    <p:spTree>
+      <p:nvGrpSpPr>
+        <p:cNvPr id="1" name=""/>
+        <p:cNvGrpSpPr/>
+        <p:nvPr/>
+      </p:nvGrpSpPr>
+      <p:grpSpPr>
+        <a:xfrm>
+          <a:off x="0" y="0"/>
+          <a:ext cx="0" cy="0"/>
+          <a:chOff x="0" y="0"/>
+          <a:chExt cx="0" cy="0"/>
+        </a:xfrm>
+      </p:grpSpPr>
+      <p:sp>
+        <p:nvSpPr>
+          <p:cNvPr id="2" name="Título 1">
+            <a:extLst>
+              <a:ext uri="{FF2B5EF4-FFF2-40B4-BE49-F238E27FC236}">
                 <a16:creationId xmlns:a16="http://schemas.microsoft.com/office/drawing/2014/main" id="{DA848BF1-DF79-8CDA-8CAA-FFFA69DB126C}"/>
               </a:ext>
             </a:extLst>
@@ -11230,7 +11824,7 @@
 </p:sld>
 </file>
 
-<file path=ppt/slides/slide21.xml><?xml version="1.0" encoding="utf-8"?>
+<file path=ppt/slides/slide23.xml><?xml version="1.0" encoding="utf-8"?>
 <p:sld xmlns:a="http://schemas.openxmlformats.org/drawingml/2006/main" xmlns:r="http://schemas.openxmlformats.org/officeDocument/2006/relationships" xmlns:p="http://schemas.openxmlformats.org/presentationml/2006/main">
   <p:cSld>
     <p:spTree>
@@ -12646,7 +13240,7 @@
           </a:xfrm>
           <a:solidFill>
             <a:schemeClr val="tx1">
-              <a:lumMod val="75000"/>
+              <a:lumMod val="50000"/>
             </a:schemeClr>
           </a:solidFill>
           <a:ln>
@@ -13224,7 +13818,7 @@
           </a:xfrm>
           <a:solidFill>
             <a:schemeClr val="tx1">
-              <a:lumMod val="75000"/>
+              <a:lumMod val="50000"/>
             </a:schemeClr>
           </a:solidFill>
           <a:ln>
